--- a/visuales/Brai-visuales.pptx
+++ b/visuales/Brai-visuales.pptx
@@ -17,9 +17,10 @@
     <p:sldId id="265" r:id="rId11"/>
     <p:sldId id="266" r:id="rId12"/>
     <p:sldId id="267" r:id="rId13"/>
+    <p:sldId id="268" r:id="rId14"/>
   </p:sldIdLst>
   <p:notesMasterIdLst>
-    <p:notesMasterId r:id="rId14"/>
+    <p:notesMasterId r:id="rId15"/>
   </p:notesMasterIdLst>
   <p:sldSz cx="12192000" cy="6858000"/>
   <p:notesSz cx="6858000" cy="12192000"/>
@@ -118,12 +119,12 @@
   <p:extLst>
     <p:ext uri="{521415D9-36F7-43E2-AB2F-B90AF26B5E84}">
       <p14:sectionLst xmlns:p14="http://schemas.microsoft.com/office/powerpoint/2010/main">
-        <p14:section name="Portada" id="{15d05b6b-9a36-7a6f-f3d8-bb8025b68514}">
+        <p14:section name="Portada" id="{b8442b22-98ae-7c81-6297-9f97994756de}">
           <p14:sldIdLst>
             <p14:sldId id="256"/>
           </p14:sldIdLst>
         </p14:section>
-        <p14:section name="Marca" id="{d5ba2a84-6ee2-ba83-ce7b-8dca1938d581}">
+        <p14:section name="Marca" id="{14b7001c-f127-4d8d-10b2-ff9456b931fc}">
           <p14:sldIdLst>
             <p14:sldId id="257"/>
             <p14:sldId id="258"/>
@@ -132,18 +133,19 @@
             <p14:sldId id="261"/>
           </p14:sldIdLst>
         </p14:section>
-        <p14:section name="Prototipo" id="{2692406a-624f-77c2-b2cb-4717e24fa900}">
+        <p14:section name="Prototipo" id="{7e260038-d8c4-0f9e-ae53-769c0f7f02fa}">
           <p14:sldIdLst>
             <p14:sldId id="262"/>
             <p14:sldId id="263"/>
             <p14:sldId id="264"/>
             <p14:sldId id="265"/>
             <p14:sldId id="266"/>
+            <p14:sldId id="267"/>
           </p14:sldIdLst>
         </p14:section>
-        <p14:section name="Cierre" id="{c65a13cf-8edb-8c65-7e56-f98322972ca7}">
+        <p14:section name="Cierre" id="{8aa375e4-fe67-6609-4b8b-05e9a4b0ebe3}">
           <p14:sldIdLst>
-            <p14:sldId id="267"/>
+            <p14:sldId id="268"/>
           </p14:sldIdLst>
         </p14:section>
       </p14:sectionLst>
@@ -838,6 +840,94 @@
             <a:fld id="{F7021451-1387-4CA6-816F-3879F97B5CBC}" type="slidenum">
               <a:rPr lang="en-US"/>
               <a:t>12</a:t>
+            </a:fld>
+            <a:endParaRPr lang="en-US"/>
+          </a:p>
+        </p:txBody>
+      </p:sp>
+    </p:spTree>
+    <p:extLst>
+      <p:ext uri="{BB962C8B-B14F-4D97-AF65-F5344CB8AC3E}">
+        <p14:creationId xmlns:p14="http://schemas.microsoft.com/office/powerpoint/2010/main" val="1024086991"/>
+      </p:ext>
+    </p:extLst>
+  </p:cSld>
+  <p:clrMapOvr>
+    <a:masterClrMapping/>
+  </p:clrMapOvr>
+</p:notes>
+</file>
+
+<file path=ppt/notesSlides/notesSlide13.xml><?xml version="1.0" encoding="utf-8"?>
+<p:notes xmlns:a="http://schemas.openxmlformats.org/drawingml/2006/main" xmlns:r="http://schemas.openxmlformats.org/officeDocument/2006/relationships" xmlns:p="http://schemas.openxmlformats.org/presentationml/2006/main">
+  <p:cSld>
+    <p:spTree>
+      <p:nvGrpSpPr>
+        <p:cNvPr id="1" name=""/>
+        <p:cNvGrpSpPr/>
+        <p:nvPr/>
+      </p:nvGrpSpPr>
+      <p:grpSpPr>
+        <a:xfrm>
+          <a:off x="0" y="0"/>
+          <a:ext cx="0" cy="0"/>
+          <a:chOff x="0" y="0"/>
+          <a:chExt cx="0" cy="0"/>
+        </a:xfrm>
+      </p:grpSpPr>
+      <p:sp>
+        <p:nvSpPr>
+          <p:cNvPr id="2" name="Slide Image Placeholder 1"/>
+          <p:cNvSpPr>
+            <a:spLocks noGrp="1" noRot="1" noChangeAspect="1"/>
+          </p:cNvSpPr>
+          <p:nvPr>
+            <p:ph type="sldImg"/>
+          </p:nvPr>
+        </p:nvSpPr>
+        <p:spPr/>
+      </p:sp>
+      <p:sp>
+        <p:nvSpPr>
+          <p:cNvPr id="3" name="Notes Placeholder 2"/>
+          <p:cNvSpPr>
+            <a:spLocks noGrp="1"/>
+          </p:cNvSpPr>
+          <p:nvPr>
+            <p:ph type="body" idx="1"/>
+          </p:nvPr>
+        </p:nvSpPr>
+        <p:spPr/>
+        <p:txBody>
+          <a:bodyPr/>
+          <a:lstStyle/>
+          <a:p>
+            <a:r>
+              <a:rPr lang="en-US" dirty="0"/>
+              <a:t/>
+            </a:r>
+            <a:endParaRPr lang="en-US" dirty="0"/>
+          </a:p>
+        </p:txBody>
+      </p:sp>
+      <p:sp>
+        <p:nvSpPr>
+          <p:cNvPr id="4" name="Slide Number Placeholder 3"/>
+          <p:cNvSpPr>
+            <a:spLocks noGrp="1"/>
+          </p:cNvSpPr>
+          <p:nvPr>
+            <p:ph type="sldNum" sz="quarter" idx="10"/>
+          </p:nvPr>
+        </p:nvSpPr>
+        <p:spPr/>
+        <p:txBody>
+          <a:bodyPr/>
+          <a:lstStyle/>
+          <a:p>
+            <a:fld id="{F7021451-1387-4CA6-816F-3879F97B5CBC}" type="slidenum">
+              <a:rPr lang="en-US"/>
+              <a:t>13</a:t>
             </a:fld>
             <a:endParaRPr lang="en-US"/>
           </a:p>
@@ -2499,7 +2589,7 @@
       </p:sp>
       <p:pic>
         <p:nvPicPr>
-          <p:cNvPr id="4" name="punto-portada" descr="Punto, la mascota de Brai">    </p:cNvPr>
+          <p:cNvPr id="4" name="imagen-1" descr="punto-tranquilo.png">    </p:cNvPr>
           <p:cNvPicPr>
             <a:picLocks noChangeAspect="1"/>
           </p:cNvPicPr>
@@ -2513,8 +2603,8 @@
         </p:blipFill>
         <p:spPr>
           <a:xfrm>
-            <a:off x="9235440" y="2651760"/>
-            <a:ext cx="2194560" cy="2394065"/>
+            <a:off x="9096031" y="2286000"/>
+            <a:ext cx="2473377" cy="2743200"/>
           </a:xfrm>
           <a:prstGeom prst="rect">
             <a:avLst/>
@@ -2627,7 +2717,7 @@
       </p:sp>
       <p:sp>
         <p:nvSpPr>
-          <p:cNvPr id="4" name="marco-75"/>
+          <p:cNvPr id="4" name="marco-76"/>
           <p:cNvSpPr/>
           <p:nvPr/>
         </p:nvSpPr>
@@ -2661,7 +2751,7 @@
       </p:sp>
       <p:pic>
         <p:nvPicPr>
-          <p:cNvPr id="5" name="pantalla-76" descr="recorrido.png">    </p:cNvPr>
+          <p:cNvPr id="5" name="pantalla-77" descr="recorrido.png">    </p:cNvPr>
           <p:cNvPicPr>
             <a:picLocks noChangeAspect="1"/>
           </p:cNvPicPr>
@@ -2685,7 +2775,7 @@
       </p:pic>
       <p:sp>
         <p:nvSpPr>
-          <p:cNvPr id="6" name="numero-77"/>
+          <p:cNvPr id="6" name="numero-78"/>
           <p:cNvSpPr/>
           <p:nvPr/>
         </p:nvSpPr>
@@ -2710,7 +2800,7 @@
       </p:sp>
       <p:sp>
         <p:nvSpPr>
-          <p:cNvPr id="7" name="texto-78"/>
+          <p:cNvPr id="7" name="texto-79"/>
           <p:cNvSpPr txBox="1"/>
           <p:nvPr/>
         </p:nvSpPr>
@@ -2746,7 +2836,7 @@
       </p:sp>
       <p:sp>
         <p:nvSpPr>
-          <p:cNvPr id="8" name="texto-79"/>
+          <p:cNvPr id="8" name="texto-80"/>
           <p:cNvSpPr txBox="1"/>
           <p:nvPr/>
         </p:nvSpPr>
@@ -2782,7 +2872,7 @@
       </p:sp>
       <p:sp>
         <p:nvSpPr>
-          <p:cNvPr id="9" name="numero-80"/>
+          <p:cNvPr id="9" name="numero-81"/>
           <p:cNvSpPr/>
           <p:nvPr/>
         </p:nvSpPr>
@@ -2807,7 +2897,7 @@
       </p:sp>
       <p:sp>
         <p:nvSpPr>
-          <p:cNvPr id="10" name="texto-81"/>
+          <p:cNvPr id="10" name="texto-82"/>
           <p:cNvSpPr txBox="1"/>
           <p:nvPr/>
         </p:nvSpPr>
@@ -2843,7 +2933,7 @@
       </p:sp>
       <p:sp>
         <p:nvSpPr>
-          <p:cNvPr id="11" name="texto-82"/>
+          <p:cNvPr id="11" name="texto-83"/>
           <p:cNvSpPr txBox="1"/>
           <p:nvPr/>
         </p:nvSpPr>
@@ -2879,7 +2969,7 @@
       </p:sp>
       <p:sp>
         <p:nvSpPr>
-          <p:cNvPr id="12" name="numero-83"/>
+          <p:cNvPr id="12" name="numero-84"/>
           <p:cNvSpPr/>
           <p:nvPr/>
         </p:nvSpPr>
@@ -2904,7 +2994,7 @@
       </p:sp>
       <p:sp>
         <p:nvSpPr>
-          <p:cNvPr id="13" name="texto-84"/>
+          <p:cNvPr id="13" name="texto-85"/>
           <p:cNvSpPr txBox="1"/>
           <p:nvPr/>
         </p:nvSpPr>
@@ -2940,7 +3030,7 @@
       </p:sp>
       <p:sp>
         <p:nvSpPr>
-          <p:cNvPr id="14" name="texto-85"/>
+          <p:cNvPr id="14" name="texto-86"/>
           <p:cNvSpPr txBox="1"/>
           <p:nvPr/>
         </p:nvSpPr>
@@ -2976,7 +3066,7 @@
       </p:sp>
       <p:sp>
         <p:nvSpPr>
-          <p:cNvPr id="15" name="numero-86"/>
+          <p:cNvPr id="15" name="numero-87"/>
           <p:cNvSpPr/>
           <p:nvPr/>
         </p:nvSpPr>
@@ -3001,7 +3091,7 @@
       </p:sp>
       <p:sp>
         <p:nvSpPr>
-          <p:cNvPr id="16" name="texto-87"/>
+          <p:cNvPr id="16" name="texto-88"/>
           <p:cNvSpPr txBox="1"/>
           <p:nvPr/>
         </p:nvSpPr>
@@ -3037,7 +3127,7 @@
       </p:sp>
       <p:sp>
         <p:nvSpPr>
-          <p:cNvPr id="17" name="texto-88"/>
+          <p:cNvPr id="17" name="texto-89"/>
           <p:cNvSpPr txBox="1"/>
           <p:nvPr/>
         </p:nvSpPr>
@@ -3073,7 +3163,7 @@
       </p:sp>
       <p:sp>
         <p:nvSpPr>
-          <p:cNvPr id="18" name="numero-89"/>
+          <p:cNvPr id="18" name="numero-90"/>
           <p:cNvSpPr/>
           <p:nvPr/>
         </p:nvSpPr>
@@ -3098,7 +3188,7 @@
       </p:sp>
       <p:sp>
         <p:nvSpPr>
-          <p:cNvPr id="19" name="texto-90"/>
+          <p:cNvPr id="19" name="texto-91"/>
           <p:cNvSpPr txBox="1"/>
           <p:nvPr/>
         </p:nvSpPr>
@@ -3134,7 +3224,7 @@
       </p:sp>
       <p:sp>
         <p:nvSpPr>
-          <p:cNvPr id="20" name="texto-91"/>
+          <p:cNvPr id="20" name="texto-92"/>
           <p:cNvSpPr txBox="1"/>
           <p:nvPr/>
         </p:nvSpPr>
@@ -3170,7 +3260,7 @@
       </p:sp>
       <p:sp>
         <p:nvSpPr>
-          <p:cNvPr id="21" name="texto-92"/>
+          <p:cNvPr id="21" name="texto-93"/>
           <p:cNvSpPr txBox="1"/>
           <p:nvPr/>
         </p:nvSpPr>
@@ -3337,7 +3427,7 @@
                 <a:ea typeface="IBM Plex Mono" pitchFamily="34" charset="-122"/>
                 <a:cs typeface="IBM Plex Mono" pitchFamily="34" charset="-120"/>
               </a:rPr>
-              <a:t>PARA COMPARTIR</a:t>
+              <a:t>DEMO PARA JOSÉ LUIS MALO</a:t>
             </a:r>
             <a:endParaRPr lang="en-US" sz="1100" dirty="0"/>
           </a:p>
@@ -3375,86 +3465,26 @@
                   <a:schemeClr val="tx1"/>
                 </a:solidFill>
               </a:rPr>
-              <a:t>Lo que se ve en WhatsApp y en redes</a:t>
+              <a:t>Sus obras reales, con su fuente</a:t>
             </a:r>
             <a:endParaRPr lang="en-US" sz="3400" dirty="0"/>
           </a:p>
         </p:txBody>
       </p:sp>
-      <p:pic>
-        <p:nvPicPr>
-          <p:cNvPr id="4" name="imagen-93" descr="imagen-para-compartir.png">    </p:cNvPr>
-          <p:cNvPicPr>
-            <a:picLocks noChangeAspect="1"/>
-          </p:cNvPicPr>
-          <p:nvPr/>
-        </p:nvPicPr>
-        <p:blipFill>
-          <a:blip r:embed="rId1"/>
-          <a:stretch>
-            <a:fillRect/>
-          </a:stretch>
-        </p:blipFill>
-        <p:spPr>
-          <a:xfrm>
-            <a:off x="548640" y="1787652"/>
-            <a:ext cx="6949440" cy="3648456"/>
-          </a:xfrm>
-          <a:prstGeom prst="rect">
-            <a:avLst/>
-          </a:prstGeom>
-        </p:spPr>
-      </p:pic>
-      <p:sp>
-        <p:nvSpPr>
-          <p:cNvPr id="5" name="texto-94"/>
-          <p:cNvSpPr txBox="1"/>
-          <p:nvPr/>
-        </p:nvSpPr>
-        <p:spPr>
-          <a:xfrm>
-            <a:off x="548640" y="5573268"/>
-            <a:ext cx="6949440" cy="320040"/>
-          </a:xfrm>
-          <a:prstGeom prst="rect">
-            <a:avLst/>
-          </a:prstGeom>
-          <a:noFill/>
-          <a:ln/>
-        </p:spPr>
-        <p:txBody>
-          <a:bodyPr wrap="square" lIns="0" tIns="0" rIns="0" bIns="0" rtlCol="0" anchor="t"/>
-          <a:lstStyle/>
-          <a:p>
-            <a:pPr indent="0" marL="0">
-              <a:buNone/>
-            </a:pPr>
-            <a:r>
-              <a:rPr lang="en-US" sz="1200" dirty="0">
-                <a:solidFill>
-                  <a:schemeClr val="tx2"/>
-                </a:solidFill>
-              </a:rPr>
-              <a:t>Imagen al pegar el link (1200 × 630)</a:t>
-            </a:r>
-            <a:endParaRPr lang="en-US" sz="1200" dirty="0"/>
-          </a:p>
-        </p:txBody>
-      </p:sp>
-      <p:sp>
-        <p:nvSpPr>
-          <p:cNvPr id="6" name="marco-95"/>
+      <p:sp>
+        <p:nvSpPr>
+          <p:cNvPr id="4" name="marco-94"/>
           <p:cNvSpPr/>
           <p:nvPr/>
         </p:nvSpPr>
         <p:spPr>
           <a:xfrm>
-            <a:off x="8513064" y="1609344"/>
-            <a:ext cx="2530602" cy="4370832"/>
+            <a:off x="740664" y="1609344"/>
+            <a:ext cx="2171613" cy="4507992"/>
           </a:xfrm>
           <a:prstGeom prst="roundRect">
             <a:avLst>
-              <a:gd name="adj" fmla="val 7949"/>
+              <a:gd name="adj" fmla="val 9264"/>
             </a:avLst>
           </a:prstGeom>
           <a:solidFill>
@@ -3477,7 +3507,65 @@
       </p:sp>
       <p:pic>
         <p:nvPicPr>
-          <p:cNvPr id="7" name="pantalla-96" descr="escena-sello-cuadro.png">    </p:cNvPr>
+          <p:cNvPr id="5" name="pantalla-95" descr="jose-luis-obra.png">    </p:cNvPr>
+          <p:cNvPicPr>
+            <a:picLocks noChangeAspect="1"/>
+          </p:cNvPicPr>
+          <p:nvPr/>
+        </p:nvPicPr>
+        <p:blipFill>
+          <a:blip r:embed="rId1"/>
+          <a:stretch>
+            <a:fillRect/>
+          </a:stretch>
+        </p:blipFill>
+        <p:spPr>
+          <a:xfrm>
+            <a:off x="822960" y="1691640"/>
+            <a:ext cx="2007021" cy="4343400"/>
+          </a:xfrm>
+          <a:prstGeom prst="rect">
+            <a:avLst/>
+          </a:prstGeom>
+        </p:spPr>
+      </p:pic>
+      <p:sp>
+        <p:nvSpPr>
+          <p:cNvPr id="6" name="marco-96"/>
+          <p:cNvSpPr/>
+          <p:nvPr/>
+        </p:nvSpPr>
+        <p:spPr>
+          <a:xfrm>
+            <a:off x="3163824" y="1609344"/>
+            <a:ext cx="2171613" cy="4507992"/>
+          </a:xfrm>
+          <a:prstGeom prst="roundRect">
+            <a:avLst>
+              <a:gd name="adj" fmla="val 9264"/>
+            </a:avLst>
+          </a:prstGeom>
+          <a:solidFill>
+            <a:srgbClr val="2B2622"/>
+          </a:solidFill>
+          <a:ln w="12700">
+            <a:solidFill>
+              <a:srgbClr val="2B2622"/>
+            </a:solidFill>
+            <a:prstDash val="solid"/>
+          </a:ln>
+          <a:effectLst>
+            <a:outerShdw sx="100000" sy="100000" kx="0" ky="0" algn="bl" rotWithShape="0" blurRad="152400" dist="50800" dir="5400000">
+              <a:srgbClr val="2B2622">
+                <a:alpha val="18000"/>
+              </a:srgbClr>
+            </a:outerShdw>
+          </a:effectLst>
+        </p:spPr>
+      </p:sp>
+      <p:pic>
+        <p:nvPicPr>
+          <p:cNvPr id="7" name="pantalla-97" descr="jose-luis-artista.png">    </p:cNvPr>
           <p:cNvPicPr>
             <a:picLocks noChangeAspect="1"/>
           </p:cNvPicPr>
@@ -3491,8 +3579,8 @@
         </p:blipFill>
         <p:spPr>
           <a:xfrm>
-            <a:off x="8595360" y="1691640"/>
-            <a:ext cx="2366010" cy="4206240"/>
+            <a:off x="3246120" y="1691640"/>
+            <a:ext cx="2007021" cy="4343400"/>
           </a:xfrm>
           <a:prstGeom prst="rect">
             <a:avLst/>
@@ -3501,14 +3589,14 @@
       </p:pic>
       <p:sp>
         <p:nvSpPr>
-          <p:cNvPr id="8" name="texto-97"/>
+          <p:cNvPr id="8" name="texto-98"/>
           <p:cNvSpPr txBox="1"/>
           <p:nvPr/>
         </p:nvSpPr>
         <p:spPr>
           <a:xfrm>
-            <a:off x="7955280" y="5989320"/>
-            <a:ext cx="3566160" cy="320040"/>
+            <a:off x="6035040" y="1828800"/>
+            <a:ext cx="5577840" cy="2377440"/>
           </a:xfrm>
           <a:prstGeom prst="rect">
             <a:avLst/>
@@ -3520,18 +3608,108 @@
           <a:bodyPr wrap="square" lIns="0" tIns="0" rIns="0" bIns="0" rtlCol="0" anchor="t"/>
           <a:lstStyle/>
           <a:p>
-            <a:pPr algn="ctr" indent="0" marL="0">
-              <a:buNone/>
-            </a:pPr>
-            <a:r>
-              <a:rPr lang="en-US" sz="1200" dirty="0">
-                <a:solidFill>
-                  <a:schemeClr val="tx2"/>
-                </a:solidFill>
-              </a:rPr>
-              <a:t>Clip vertical de 10 s para el infomercial o un Reel</a:t>
-            </a:r>
-            <a:endParaRPr lang="en-US" sz="1200" dirty="0"/>
+            <a:pPr marL="342900" indent="-342900">
+              <a:spcAft>
+                <a:spcPts val="1000"/>
+              </a:spcAft>
+              <a:buSzPct val="100000"/>
+              <a:buChar char="•"/>
+            </a:pPr>
+            <a:r>
+              <a:rPr lang="en-US" sz="1600" dirty="0">
+                <a:solidFill>
+                  <a:schemeClr val="tx1"/>
+                </a:solidFill>
+              </a:rPr>
+              <a:t>Títulos, técnica y medidas de fuentes públicas. Lo que no tiene fuente dice "Por confirmar".</a:t>
+            </a:r>
+            <a:endParaRPr lang="en-US" sz="1600" dirty="0"/>
+          </a:p>
+          <a:p>
+            <a:pPr marL="342900" indent="-342900">
+              <a:spcAft>
+                <a:spcPts val="1000"/>
+              </a:spcAft>
+              <a:buSzPct val="100000"/>
+              <a:buChar char="•"/>
+            </a:pPr>
+            <a:r>
+              <a:rPr lang="en-US" sz="1600" dirty="0">
+                <a:solidFill>
+                  <a:schemeClr val="tx1"/>
+                </a:solidFill>
+              </a:rPr>
+              <a:t>Ningún dueño inventado sobre una obra real.</a:t>
+            </a:r>
+            <a:endParaRPr lang="en-US" sz="1600" dirty="0"/>
+          </a:p>
+          <a:p>
+            <a:pPr marL="342900" indent="-342900">
+              <a:spcAft>
+                <a:spcPts val="1000"/>
+              </a:spcAft>
+              <a:buSzPct val="100000"/>
+              <a:buChar char="•"/>
+            </a:pPr>
+            <a:r>
+              <a:rPr lang="en-US" sz="1600" dirty="0">
+                <a:solidFill>
+                  <a:schemeClr val="tx1"/>
+                </a:solidFill>
+              </a:rPr>
+              <a:t>Fotos pendientes: solo con su permiso.</a:t>
+            </a:r>
+            <a:endParaRPr lang="en-US" sz="1600" dirty="0"/>
+          </a:p>
+        </p:txBody>
+      </p:sp>
+      <p:sp>
+        <p:nvSpPr>
+          <p:cNvPr id="9" name="texto-99"/>
+          <p:cNvSpPr txBox="1"/>
+          <p:nvPr/>
+        </p:nvSpPr>
+        <p:spPr>
+          <a:xfrm>
+            <a:off x="6035040" y="4846320"/>
+            <a:ext cx="5577840" cy="457200"/>
+          </a:xfrm>
+          <a:prstGeom prst="rect">
+            <a:avLst/>
+          </a:prstGeom>
+          <a:noFill/>
+          <a:ln/>
+        </p:spPr>
+        <p:txBody>
+          <a:bodyPr wrap="square" lIns="0" tIns="0" rIns="0" bIns="0" rtlCol="0" anchor="t"/>
+          <a:lstStyle/>
+          <a:p>
+            <a:pPr indent="0" marL="0">
+              <a:buNone/>
+            </a:pPr>
+            <a:r>
+              <a:rPr lang="en-US" sz="1500" b="1" dirty="0">
+                <a:solidFill>
+                  <a:schemeClr val="tx1"/>
+                </a:solidFill>
+              </a:rPr>
+              <a:t>Link: </a:t>
+            </a:r>
+            <a:pPr indent="0" marL="0">
+              <a:buNone/>
+            </a:pPr>
+            <a:r>
+              <a:rPr lang="en-US" sz="1500" dirty="0">
+                <a:solidFill>
+                  <a:schemeClr val="tx1"/>
+                </a:solidFill>
+                <a:latin typeface="IBM Plex Mono" pitchFamily="34" charset="0"/>
+                <a:ea typeface="IBM Plex Mono" pitchFamily="34" charset="-122"/>
+                <a:cs typeface="IBM Plex Mono" pitchFamily="34" charset="-120"/>
+              </a:rPr>
+              <a:t>braiart.vercel.app/jose-luis</a:t>
+            </a:r>
+            <a:endParaRPr lang="en-US" sz="1500" dirty="0"/>
           </a:p>
         </p:txBody>
       </p:sp>
@@ -3610,91 +3788,57 @@
       </p:grpSpPr>
       <p:sp>
         <p:nvSpPr>
-          <p:cNvPr id="2" name="Text 0"/>
+          <p:cNvPr id="2" name="Text 1"/>
           <p:cNvSpPr/>
           <p:nvPr>
-            <p:ph idx="100" type="title" hasCustomPrompt="1"/>
+            <p:ph idx="102" type="body" hasCustomPrompt="1"/>
           </p:nvPr>
         </p:nvSpPr>
         <p:spPr>
           <a:xfrm>
-            <a:off x="731520" y="822960"/>
-            <a:ext cx="10698480" cy="1280160"/>
-          </a:xfrm>
-          <a:prstGeom prst="rect">
-            <a:avLst/>
-          </a:prstGeom>
-          <a:noFill/>
-          <a:ln/>
-        </p:spPr>
-        <p:txBody>
-          <a:bodyPr wrap="square" lIns="0" tIns="0" rIns="0" bIns="0" rtlCol="0" anchor="t"/>
+            <a:off x="548640" y="411480"/>
+            <a:ext cx="7315200" cy="274320"/>
+          </a:xfrm>
+          <a:prstGeom prst="rect">
+            <a:avLst/>
+          </a:prstGeom>
+          <a:noFill/>
+          <a:ln/>
+        </p:spPr>
+        <p:txBody>
+          <a:bodyPr wrap="square" lIns="0" tIns="0" rIns="0" bIns="0" rtlCol="0"/>
           <a:lstStyle/>
           <a:p>
             <a:pPr algn="l" indent="0" marL="0">
               <a:buNone/>
             </a:pPr>
             <a:r>
-              <a:rPr lang="en-US" sz="4000" b="1" dirty="0">
-                <a:solidFill>
-                  <a:schemeClr val="bg1"/>
-                </a:solidFill>
-              </a:rPr>
-              <a:t>Todo vive en el mismo link de Vercel</a:t>
-            </a:r>
-            <a:endParaRPr lang="en-US" sz="4000" dirty="0"/>
-          </a:p>
-        </p:txBody>
-      </p:sp>
-      <p:sp>
-        <p:nvSpPr>
-          <p:cNvPr id="3" name="texto-98"/>
-          <p:cNvSpPr txBox="1"/>
-          <p:nvPr/>
-        </p:nvSpPr>
-        <p:spPr>
-          <a:xfrm>
-            <a:off x="731520" y="2377440"/>
-            <a:ext cx="4023360" cy="411480"/>
-          </a:xfrm>
-          <a:prstGeom prst="rect">
-            <a:avLst/>
-          </a:prstGeom>
-          <a:noFill/>
-          <a:ln/>
-        </p:spPr>
-        <p:txBody>
-          <a:bodyPr wrap="square" lIns="0" tIns="0" rIns="0" bIns="0" rtlCol="0" anchor="t"/>
-          <a:lstStyle/>
-          <a:p>
-            <a:pPr indent="0" marL="0">
-              <a:buNone/>
-            </a:pPr>
-            <a:r>
-              <a:rPr lang="en-US" sz="1600" dirty="0">
-                <a:solidFill>
-                  <a:schemeClr val="accent3"/>
+              <a:rPr lang="en-US" sz="1100" spc="200" kern="0" dirty="0">
+                <a:solidFill>
+                  <a:schemeClr val="tx2"/>
                 </a:solidFill>
                 <a:latin typeface="IBM Plex Mono" pitchFamily="34" charset="0"/>
                 <a:ea typeface="IBM Plex Mono" pitchFamily="34" charset="-122"/>
                 <a:cs typeface="IBM Plex Mono" pitchFamily="34" charset="-120"/>
               </a:rPr>
-              <a:t>/</a:t>
-            </a:r>
-            <a:endParaRPr lang="en-US" sz="1600" dirty="0"/>
-          </a:p>
-        </p:txBody>
-      </p:sp>
-      <p:sp>
-        <p:nvSpPr>
-          <p:cNvPr id="4" name="texto-99"/>
-          <p:cNvSpPr txBox="1"/>
-          <p:nvPr/>
-        </p:nvSpPr>
-        <p:spPr>
-          <a:xfrm>
-            <a:off x="4846320" y="2377440"/>
-            <a:ext cx="6583680" cy="411480"/>
+              <a:t>PARA COMPARTIR</a:t>
+            </a:r>
+            <a:endParaRPr lang="en-US" sz="1100" dirty="0"/>
+          </a:p>
+        </p:txBody>
+      </p:sp>
+      <p:sp>
+        <p:nvSpPr>
+          <p:cNvPr id="3" name="Text 1"/>
+          <p:cNvSpPr/>
+          <p:nvPr>
+            <p:ph idx="103" type="title" hasCustomPrompt="1"/>
+          </p:nvPr>
+        </p:nvSpPr>
+        <p:spPr>
+          <a:xfrm>
+            <a:off x="548640" y="713232"/>
+            <a:ext cx="11064240" cy="777240"/>
           </a:xfrm>
           <a:prstGeom prst="rect">
             <a:avLst/>
@@ -3706,399 +3850,24 @@
           <a:bodyPr wrap="square" lIns="0" tIns="0" rIns="0" bIns="0" rtlCol="0" anchor="t"/>
           <a:lstStyle/>
           <a:p>
-            <a:pPr indent="0" marL="0">
-              <a:buNone/>
-            </a:pPr>
-            <a:r>
-              <a:rPr lang="en-US" sz="1600" dirty="0">
-                <a:solidFill>
-                  <a:schemeClr val="bg1"/>
-                </a:solidFill>
-              </a:rPr>
-              <a:t>Landing</a:t>
-            </a:r>
-            <a:endParaRPr lang="en-US" sz="1600" dirty="0"/>
-          </a:p>
-        </p:txBody>
-      </p:sp>
-      <p:sp>
-        <p:nvSpPr>
-          <p:cNvPr id="5" name="texto-100"/>
-          <p:cNvSpPr txBox="1"/>
-          <p:nvPr/>
-        </p:nvSpPr>
-        <p:spPr>
-          <a:xfrm>
-            <a:off x="731520" y="2926080"/>
-            <a:ext cx="4023360" cy="411480"/>
-          </a:xfrm>
-          <a:prstGeom prst="rect">
-            <a:avLst/>
-          </a:prstGeom>
-          <a:noFill/>
-          <a:ln/>
-        </p:spPr>
-        <p:txBody>
-          <a:bodyPr wrap="square" lIns="0" tIns="0" rIns="0" bIns="0" rtlCol="0" anchor="t"/>
-          <a:lstStyle/>
-          <a:p>
-            <a:pPr indent="0" marL="0">
-              <a:buNone/>
-            </a:pPr>
-            <a:r>
-              <a:rPr lang="en-US" sz="1600" dirty="0">
-                <a:solidFill>
-                  <a:schemeClr val="accent3"/>
-                </a:solidFill>
-                <a:latin typeface="IBM Plex Mono" pitchFamily="34" charset="0"/>
-                <a:ea typeface="IBM Plex Mono" pitchFamily="34" charset="-122"/>
-                <a:cs typeface="IBM Plex Mono" pitchFamily="34" charset="-120"/>
-              </a:rPr>
-              <a:t>/o/7KQ2X</a:t>
-            </a:r>
-            <a:endParaRPr lang="en-US" sz="1600" dirty="0"/>
-          </a:p>
-        </p:txBody>
-      </p:sp>
-      <p:sp>
-        <p:nvSpPr>
-          <p:cNvPr id="6" name="texto-101"/>
-          <p:cNvSpPr txBox="1"/>
-          <p:nvPr/>
-        </p:nvSpPr>
-        <p:spPr>
-          <a:xfrm>
-            <a:off x="4846320" y="2926080"/>
-            <a:ext cx="6583680" cy="411480"/>
-          </a:xfrm>
-          <a:prstGeom prst="rect">
-            <a:avLst/>
-          </a:prstGeom>
-          <a:noFill/>
-          <a:ln/>
-        </p:spPr>
-        <p:txBody>
-          <a:bodyPr wrap="square" lIns="0" tIns="0" rIns="0" bIns="0" rtlCol="0" anchor="t"/>
-          <a:lstStyle/>
-          <a:p>
-            <a:pPr indent="0" marL="0">
-              <a:buNone/>
-            </a:pPr>
-            <a:r>
-              <a:rPr lang="en-US" sz="1600" dirty="0">
-                <a:solidFill>
-                  <a:schemeClr val="bg1"/>
-                </a:solidFill>
-              </a:rPr>
-              <a:t>Página de una obra (código de dueño 4K7P-9QX2)</a:t>
-            </a:r>
-            <a:endParaRPr lang="en-US" sz="1600" dirty="0"/>
-          </a:p>
-        </p:txBody>
-      </p:sp>
-      <p:sp>
-        <p:nvSpPr>
-          <p:cNvPr id="7" name="texto-102"/>
-          <p:cNvSpPr txBox="1"/>
-          <p:nvPr/>
-        </p:nvSpPr>
-        <p:spPr>
-          <a:xfrm>
-            <a:off x="731520" y="3474720"/>
-            <a:ext cx="4023360" cy="411480"/>
-          </a:xfrm>
-          <a:prstGeom prst="rect">
-            <a:avLst/>
-          </a:prstGeom>
-          <a:noFill/>
-          <a:ln/>
-        </p:spPr>
-        <p:txBody>
-          <a:bodyPr wrap="square" lIns="0" tIns="0" rIns="0" bIns="0" rtlCol="0" anchor="t"/>
-          <a:lstStyle/>
-          <a:p>
-            <a:pPr indent="0" marL="0">
-              <a:buNone/>
-            </a:pPr>
-            <a:r>
-              <a:rPr lang="en-US" sz="1600" dirty="0">
-                <a:solidFill>
-                  <a:schemeClr val="accent3"/>
-                </a:solidFill>
-                <a:latin typeface="IBM Plex Mono" pitchFamily="34" charset="0"/>
-                <a:ea typeface="IBM Plex Mono" pitchFamily="34" charset="-122"/>
-                <a:cs typeface="IBM Plex Mono" pitchFamily="34" charset="-120"/>
-              </a:rPr>
-              <a:t>/panel</a:t>
-            </a:r>
-            <a:endParaRPr lang="en-US" sz="1600" dirty="0"/>
-          </a:p>
-        </p:txBody>
-      </p:sp>
-      <p:sp>
-        <p:nvSpPr>
-          <p:cNvPr id="8" name="texto-103"/>
-          <p:cNvSpPr txBox="1"/>
-          <p:nvPr/>
-        </p:nvSpPr>
-        <p:spPr>
-          <a:xfrm>
-            <a:off x="4846320" y="3474720"/>
-            <a:ext cx="6583680" cy="411480"/>
-          </a:xfrm>
-          <a:prstGeom prst="rect">
-            <a:avLst/>
-          </a:prstGeom>
-          <a:noFill/>
-          <a:ln/>
-        </p:spPr>
-        <p:txBody>
-          <a:bodyPr wrap="square" lIns="0" tIns="0" rIns="0" bIns="0" rtlCol="0" anchor="t"/>
-          <a:lstStyle/>
-          <a:p>
-            <a:pPr indent="0" marL="0">
-              <a:buNone/>
-            </a:pPr>
-            <a:r>
-              <a:rPr lang="en-US" sz="1600" dirty="0">
-                <a:solidFill>
-                  <a:schemeClr val="bg1"/>
-                </a:solidFill>
-              </a:rPr>
-              <a:t>Panel del artista</a:t>
-            </a:r>
-            <a:endParaRPr lang="en-US" sz="1600" dirty="0"/>
-          </a:p>
-        </p:txBody>
-      </p:sp>
-      <p:sp>
-        <p:nvSpPr>
-          <p:cNvPr id="9" name="texto-104"/>
-          <p:cNvSpPr txBox="1"/>
-          <p:nvPr/>
-        </p:nvSpPr>
-        <p:spPr>
-          <a:xfrm>
-            <a:off x="731520" y="4023360"/>
-            <a:ext cx="4023360" cy="411480"/>
-          </a:xfrm>
-          <a:prstGeom prst="rect">
-            <a:avLst/>
-          </a:prstGeom>
-          <a:noFill/>
-          <a:ln/>
-        </p:spPr>
-        <p:txBody>
-          <a:bodyPr wrap="square" lIns="0" tIns="0" rIns="0" bIns="0" rtlCol="0" anchor="t"/>
-          <a:lstStyle/>
-          <a:p>
-            <a:pPr indent="0" marL="0">
-              <a:buNone/>
-            </a:pPr>
-            <a:r>
-              <a:rPr lang="en-US" sz="1600" dirty="0">
-                <a:solidFill>
-                  <a:schemeClr val="accent3"/>
-                </a:solidFill>
-                <a:latin typeface="IBM Plex Mono" pitchFamily="34" charset="0"/>
-                <a:ea typeface="IBM Plex Mono" pitchFamily="34" charset="-122"/>
-                <a:cs typeface="IBM Plex Mono" pitchFamily="34" charset="-120"/>
-              </a:rPr>
-              <a:t>/recorrido?para=Nombre</a:t>
-            </a:r>
-            <a:endParaRPr lang="en-US" sz="1600" dirty="0"/>
-          </a:p>
-        </p:txBody>
-      </p:sp>
-      <p:sp>
-        <p:nvSpPr>
-          <p:cNvPr id="10" name="texto-105"/>
-          <p:cNvSpPr txBox="1"/>
-          <p:nvPr/>
-        </p:nvSpPr>
-        <p:spPr>
-          <a:xfrm>
-            <a:off x="4846320" y="4023360"/>
-            <a:ext cx="6583680" cy="411480"/>
-          </a:xfrm>
-          <a:prstGeom prst="rect">
-            <a:avLst/>
-          </a:prstGeom>
-          <a:noFill/>
-          <a:ln/>
-        </p:spPr>
-        <p:txBody>
-          <a:bodyPr wrap="square" lIns="0" tIns="0" rIns="0" bIns="0" rtlCol="0" anchor="t"/>
-          <a:lstStyle/>
-          <a:p>
-            <a:pPr indent="0" marL="0">
-              <a:buNone/>
-            </a:pPr>
-            <a:r>
-              <a:rPr lang="en-US" sz="1600" dirty="0">
-                <a:solidFill>
-                  <a:schemeClr val="bg1"/>
-                </a:solidFill>
-              </a:rPr>
-              <a:t>Recorrido de 5 minutos</a:t>
-            </a:r>
-            <a:endParaRPr lang="en-US" sz="1600" dirty="0"/>
-          </a:p>
-        </p:txBody>
-      </p:sp>
-      <p:sp>
-        <p:nvSpPr>
-          <p:cNvPr id="11" name="texto-106"/>
-          <p:cNvSpPr txBox="1"/>
-          <p:nvPr/>
-        </p:nvSpPr>
-        <p:spPr>
-          <a:xfrm>
-            <a:off x="731520" y="4572000"/>
-            <a:ext cx="4023360" cy="411480"/>
-          </a:xfrm>
-          <a:prstGeom prst="rect">
-            <a:avLst/>
-          </a:prstGeom>
-          <a:noFill/>
-          <a:ln/>
-        </p:spPr>
-        <p:txBody>
-          <a:bodyPr wrap="square" lIns="0" tIns="0" rIns="0" bIns="0" rtlCol="0" anchor="t"/>
-          <a:lstStyle/>
-          <a:p>
-            <a:pPr indent="0" marL="0">
-              <a:buNone/>
-            </a:pPr>
-            <a:r>
-              <a:rPr lang="en-US" sz="1600" dirty="0">
-                <a:solidFill>
-                  <a:schemeClr val="accent3"/>
-                </a:solidFill>
-                <a:latin typeface="IBM Plex Mono" pitchFamily="34" charset="0"/>
-                <a:ea typeface="IBM Plex Mono" pitchFamily="34" charset="-122"/>
-                <a:cs typeface="IBM Plex Mono" pitchFamily="34" charset="-120"/>
-              </a:rPr>
-              <a:t>/marca</a:t>
-            </a:r>
-            <a:endParaRPr lang="en-US" sz="1600" dirty="0"/>
-          </a:p>
-        </p:txBody>
-      </p:sp>
-      <p:sp>
-        <p:nvSpPr>
-          <p:cNvPr id="12" name="texto-107"/>
-          <p:cNvSpPr txBox="1"/>
-          <p:nvPr/>
-        </p:nvSpPr>
-        <p:spPr>
-          <a:xfrm>
-            <a:off x="4846320" y="4572000"/>
-            <a:ext cx="6583680" cy="411480"/>
-          </a:xfrm>
-          <a:prstGeom prst="rect">
-            <a:avLst/>
-          </a:prstGeom>
-          <a:noFill/>
-          <a:ln/>
-        </p:spPr>
-        <p:txBody>
-          <a:bodyPr wrap="square" lIns="0" tIns="0" rIns="0" bIns="0" rtlCol="0" anchor="t"/>
-          <a:lstStyle/>
-          <a:p>
-            <a:pPr indent="0" marL="0">
-              <a:buNone/>
-            </a:pPr>
-            <a:r>
-              <a:rPr lang="en-US" sz="1600" dirty="0">
-                <a:solidFill>
-                  <a:schemeClr val="bg1"/>
-                </a:solidFill>
-              </a:rPr>
-              <a:t>Kit de marca y Punto</a:t>
-            </a:r>
-            <a:endParaRPr lang="en-US" sz="1600" dirty="0"/>
-          </a:p>
-        </p:txBody>
-      </p:sp>
-      <p:sp>
-        <p:nvSpPr>
-          <p:cNvPr id="13" name="texto-108"/>
-          <p:cNvSpPr txBox="1"/>
-          <p:nvPr/>
-        </p:nvSpPr>
-        <p:spPr>
-          <a:xfrm>
-            <a:off x="731520" y="5120640"/>
-            <a:ext cx="4023360" cy="411480"/>
-          </a:xfrm>
-          <a:prstGeom prst="rect">
-            <a:avLst/>
-          </a:prstGeom>
-          <a:noFill/>
-          <a:ln/>
-        </p:spPr>
-        <p:txBody>
-          <a:bodyPr wrap="square" lIns="0" tIns="0" rIns="0" bIns="0" rtlCol="0" anchor="t"/>
-          <a:lstStyle/>
-          <a:p>
-            <a:pPr indent="0" marL="0">
-              <a:buNone/>
-            </a:pPr>
-            <a:r>
-              <a:rPr lang="en-US" sz="1600" dirty="0">
-                <a:solidFill>
-                  <a:schemeClr val="accent3"/>
-                </a:solidFill>
-                <a:latin typeface="IBM Plex Mono" pitchFamily="34" charset="0"/>
-                <a:ea typeface="IBM Plex Mono" pitchFamily="34" charset="-122"/>
-                <a:cs typeface="IBM Plex Mono" pitchFamily="34" charset="-120"/>
-              </a:rPr>
-              <a:t>/imprimir/7KQ2X</a:t>
-            </a:r>
-            <a:endParaRPr lang="en-US" sz="1600" dirty="0"/>
-          </a:p>
-        </p:txBody>
-      </p:sp>
-      <p:sp>
-        <p:nvSpPr>
-          <p:cNvPr id="14" name="texto-109"/>
-          <p:cNvSpPr txBox="1"/>
-          <p:nvPr/>
-        </p:nvSpPr>
-        <p:spPr>
-          <a:xfrm>
-            <a:off x="4846320" y="5120640"/>
-            <a:ext cx="6583680" cy="411480"/>
-          </a:xfrm>
-          <a:prstGeom prst="rect">
-            <a:avLst/>
-          </a:prstGeom>
-          <a:noFill/>
-          <a:ln/>
-        </p:spPr>
-        <p:txBody>
-          <a:bodyPr wrap="square" lIns="0" tIns="0" rIns="0" bIns="0" rtlCol="0" anchor="t"/>
-          <a:lstStyle/>
-          <a:p>
-            <a:pPr indent="0" marL="0">
-              <a:buNone/>
-            </a:pPr>
-            <a:r>
-              <a:rPr lang="en-US" sz="1600" dirty="0">
-                <a:solidFill>
-                  <a:schemeClr val="bg1"/>
-                </a:solidFill>
-              </a:rPr>
-              <a:t>Piezas en tamaño real</a:t>
-            </a:r>
-            <a:endParaRPr lang="en-US" sz="1600" dirty="0"/>
+            <a:pPr algn="l" indent="0" marL="0">
+              <a:buNone/>
+            </a:pPr>
+            <a:r>
+              <a:rPr lang="en-US" sz="3400" b="1" dirty="0">
+                <a:solidFill>
+                  <a:schemeClr val="tx1"/>
+                </a:solidFill>
+              </a:rPr>
+              <a:t>Lo que se ve en WhatsApp y en redes</a:t>
+            </a:r>
+            <a:endParaRPr lang="en-US" sz="3400" dirty="0"/>
           </a:p>
         </p:txBody>
       </p:sp>
       <p:pic>
         <p:nvPicPr>
-          <p:cNvPr id="15" name="punto-cierre" descr="Punto feliz">    </p:cNvPr>
+          <p:cNvPr id="4" name="imagen-100" descr="imagen-para-compartir.png">    </p:cNvPr>
           <p:cNvPicPr>
             <a:picLocks noChangeAspect="1"/>
           </p:cNvPicPr>
@@ -4112,8 +3881,798 @@
         </p:blipFill>
         <p:spPr>
           <a:xfrm>
-            <a:off x="10149840" y="4846320"/>
-            <a:ext cx="1371600" cy="1496291"/>
+            <a:off x="548640" y="1787652"/>
+            <a:ext cx="6949440" cy="3648456"/>
+          </a:xfrm>
+          <a:prstGeom prst="rect">
+            <a:avLst/>
+          </a:prstGeom>
+        </p:spPr>
+      </p:pic>
+      <p:sp>
+        <p:nvSpPr>
+          <p:cNvPr id="5" name="texto-101"/>
+          <p:cNvSpPr txBox="1"/>
+          <p:nvPr/>
+        </p:nvSpPr>
+        <p:spPr>
+          <a:xfrm>
+            <a:off x="548640" y="5573268"/>
+            <a:ext cx="6949440" cy="320040"/>
+          </a:xfrm>
+          <a:prstGeom prst="rect">
+            <a:avLst/>
+          </a:prstGeom>
+          <a:noFill/>
+          <a:ln/>
+        </p:spPr>
+        <p:txBody>
+          <a:bodyPr wrap="square" lIns="0" tIns="0" rIns="0" bIns="0" rtlCol="0" anchor="t"/>
+          <a:lstStyle/>
+          <a:p>
+            <a:pPr indent="0" marL="0">
+              <a:buNone/>
+            </a:pPr>
+            <a:r>
+              <a:rPr lang="en-US" sz="1200" dirty="0">
+                <a:solidFill>
+                  <a:schemeClr val="tx2"/>
+                </a:solidFill>
+              </a:rPr>
+              <a:t>Imagen al pegar el link (1200 × 630)</a:t>
+            </a:r>
+            <a:endParaRPr lang="en-US" sz="1200" dirty="0"/>
+          </a:p>
+        </p:txBody>
+      </p:sp>
+      <p:sp>
+        <p:nvSpPr>
+          <p:cNvPr id="6" name="marco-102"/>
+          <p:cNvSpPr/>
+          <p:nvPr/>
+        </p:nvSpPr>
+        <p:spPr>
+          <a:xfrm>
+            <a:off x="8513064" y="1609344"/>
+            <a:ext cx="2530602" cy="4370832"/>
+          </a:xfrm>
+          <a:prstGeom prst="roundRect">
+            <a:avLst>
+              <a:gd name="adj" fmla="val 7949"/>
+            </a:avLst>
+          </a:prstGeom>
+          <a:solidFill>
+            <a:srgbClr val="2B2622"/>
+          </a:solidFill>
+          <a:ln w="12700">
+            <a:solidFill>
+              <a:srgbClr val="2B2622"/>
+            </a:solidFill>
+            <a:prstDash val="solid"/>
+          </a:ln>
+          <a:effectLst>
+            <a:outerShdw sx="100000" sy="100000" kx="0" ky="0" algn="bl" rotWithShape="0" blurRad="152400" dist="50800" dir="5400000">
+              <a:srgbClr val="2B2622">
+                <a:alpha val="18000"/>
+              </a:srgbClr>
+            </a:outerShdw>
+          </a:effectLst>
+        </p:spPr>
+      </p:sp>
+      <p:pic>
+        <p:nvPicPr>
+          <p:cNvPr id="7" name="pantalla-103" descr="escena-sello-cuadro.png">    </p:cNvPr>
+          <p:cNvPicPr>
+            <a:picLocks noChangeAspect="1"/>
+          </p:cNvPicPr>
+          <p:nvPr/>
+        </p:nvPicPr>
+        <p:blipFill>
+          <a:blip r:embed="rId2"/>
+          <a:stretch>
+            <a:fillRect/>
+          </a:stretch>
+        </p:blipFill>
+        <p:spPr>
+          <a:xfrm>
+            <a:off x="8595360" y="1691640"/>
+            <a:ext cx="2366010" cy="4206240"/>
+          </a:xfrm>
+          <a:prstGeom prst="rect">
+            <a:avLst/>
+          </a:prstGeom>
+        </p:spPr>
+      </p:pic>
+      <p:sp>
+        <p:nvSpPr>
+          <p:cNvPr id="8" name="texto-104"/>
+          <p:cNvSpPr txBox="1"/>
+          <p:nvPr/>
+        </p:nvSpPr>
+        <p:spPr>
+          <a:xfrm>
+            <a:off x="7955280" y="5989320"/>
+            <a:ext cx="3566160" cy="320040"/>
+          </a:xfrm>
+          <a:prstGeom prst="rect">
+            <a:avLst/>
+          </a:prstGeom>
+          <a:noFill/>
+          <a:ln/>
+        </p:spPr>
+        <p:txBody>
+          <a:bodyPr wrap="square" lIns="0" tIns="0" rIns="0" bIns="0" rtlCol="0" anchor="t"/>
+          <a:lstStyle/>
+          <a:p>
+            <a:pPr algn="ctr" indent="0" marL="0">
+              <a:buNone/>
+            </a:pPr>
+            <a:r>
+              <a:rPr lang="en-US" sz="1200" dirty="0">
+                <a:solidFill>
+                  <a:schemeClr val="tx2"/>
+                </a:solidFill>
+              </a:rPr>
+              <a:t>Clip vertical de 10 s para el infomercial o un Reel</a:t>
+            </a:r>
+            <a:endParaRPr lang="en-US" sz="1200" dirty="0"/>
+          </a:p>
+        </p:txBody>
+      </p:sp>
+      <p:sp>
+        <p:nvSpPr>
+          <p:cNvPr id="25" name="Slide Number Placeholder 0"/>
+          <p:cNvSpPr>
+            <a:spLocks noGrp="1"/>
+          </p:cNvSpPr>
+          <p:nvPr>
+            <p:ph type="sldNum" sz="quarter" idx="4294967295"/>
+          </p:nvPr>
+        </p:nvSpPr>
+        <p:spPr>
+          <a:xfrm>
+            <a:off x="11201400" y="6309360"/>
+            <a:ext cx="457200" cy="292608"/>
+          </a:xfrm>
+          <a:prstGeom prst="rect">
+            <a:avLst/>
+          </a:prstGeom>
+          <a:extLst>
+            <a:ext uri="{C572A759-6A51-4108-AA02-DFA0A04FC94B}">
+              <ma14:wrappingTextBoxFlag xmlns:ma14="http://schemas.microsoft.com/office/mac/drawingml/2011/main" val="0"/>
+            </a:ext>
+          </a:extLst>
+        </p:spPr>
+        <p:txBody>
+          <a:bodyPr/>
+          <a:lstStyle>
+            <a:lvl1pPr>
+              <a:defRPr sz="1000">
+                <a:solidFill>
+                  <a:srgbClr val="5E6C52"/>
+                </a:solidFill>
+                <a:latin typeface="IBM Plex Mono"/>
+                <a:ea typeface="IBM Plex Mono"/>
+                <a:cs typeface="IBM Plex Mono"/>
+              </a:defRPr>
+            </a:lvl1pPr>
+          </a:lstStyle>
+          <a:p>
+            <a:pPr algn="r"/>
+            <a:fld id="{F7021451-1387-4CA6-816F-3879F97B5CBC}" type="slidenum">
+              <a:rPr b="0" lang="en-US"/>
+              <a:t>12</a:t>
+            </a:fld>
+            <a:endParaRPr lang="en-US"/>
+          </a:p>
+        </p:txBody>
+      </p:sp>
+    </p:spTree>
+  </p:cSld>
+  <p:clrMapOvr>
+    <a:masterClrMapping/>
+  </p:clrMapOvr>
+</p:sld>
+</file>
+
+<file path=ppt/slides/slide13.xml><?xml version="1.0" encoding="utf-8"?>
+<p:sld xmlns:a="http://schemas.openxmlformats.org/drawingml/2006/main" xmlns:r="http://schemas.openxmlformats.org/officeDocument/2006/relationships" xmlns:p="http://schemas.openxmlformats.org/presentationml/2006/main">
+  <p:cSld name="Slide 13">
+    <p:spTree>
+      <p:nvGrpSpPr>
+        <p:cNvPr id="1" name=""/>
+        <p:cNvGrpSpPr/>
+        <p:nvPr/>
+      </p:nvGrpSpPr>
+      <p:grpSpPr>
+        <a:xfrm>
+          <a:off x="0" y="0"/>
+          <a:ext cx="0" cy="0"/>
+          <a:chOff x="0" y="0"/>
+          <a:chExt cx="0" cy="0"/>
+        </a:xfrm>
+      </p:grpSpPr>
+      <p:sp>
+        <p:nvSpPr>
+          <p:cNvPr id="2" name="Text 0"/>
+          <p:cNvSpPr/>
+          <p:nvPr>
+            <p:ph idx="100" type="title" hasCustomPrompt="1"/>
+          </p:nvPr>
+        </p:nvSpPr>
+        <p:spPr>
+          <a:xfrm>
+            <a:off x="731520" y="822960"/>
+            <a:ext cx="10698480" cy="1280160"/>
+          </a:xfrm>
+          <a:prstGeom prst="rect">
+            <a:avLst/>
+          </a:prstGeom>
+          <a:noFill/>
+          <a:ln/>
+        </p:spPr>
+        <p:txBody>
+          <a:bodyPr wrap="square" lIns="0" tIns="0" rIns="0" bIns="0" rtlCol="0" anchor="t"/>
+          <a:lstStyle/>
+          <a:p>
+            <a:pPr algn="l" indent="0" marL="0">
+              <a:buNone/>
+            </a:pPr>
+            <a:r>
+              <a:rPr lang="en-US" sz="4000" b="1" dirty="0">
+                <a:solidFill>
+                  <a:schemeClr val="bg1"/>
+                </a:solidFill>
+              </a:rPr>
+              <a:t>Todo vive en el mismo link de Vercel</a:t>
+            </a:r>
+            <a:endParaRPr lang="en-US" sz="4000" dirty="0"/>
+          </a:p>
+        </p:txBody>
+      </p:sp>
+      <p:sp>
+        <p:nvSpPr>
+          <p:cNvPr id="3" name="texto-105"/>
+          <p:cNvSpPr txBox="1"/>
+          <p:nvPr/>
+        </p:nvSpPr>
+        <p:spPr>
+          <a:xfrm>
+            <a:off x="731520" y="2377440"/>
+            <a:ext cx="4023360" cy="411480"/>
+          </a:xfrm>
+          <a:prstGeom prst="rect">
+            <a:avLst/>
+          </a:prstGeom>
+          <a:noFill/>
+          <a:ln/>
+        </p:spPr>
+        <p:txBody>
+          <a:bodyPr wrap="square" lIns="0" tIns="0" rIns="0" bIns="0" rtlCol="0" anchor="t"/>
+          <a:lstStyle/>
+          <a:p>
+            <a:pPr indent="0" marL="0">
+              <a:buNone/>
+            </a:pPr>
+            <a:r>
+              <a:rPr lang="en-US" sz="1600" dirty="0">
+                <a:solidFill>
+                  <a:schemeClr val="accent3"/>
+                </a:solidFill>
+                <a:latin typeface="IBM Plex Mono" pitchFamily="34" charset="0"/>
+                <a:ea typeface="IBM Plex Mono" pitchFamily="34" charset="-122"/>
+                <a:cs typeface="IBM Plex Mono" pitchFamily="34" charset="-120"/>
+              </a:rPr>
+              <a:t>/</a:t>
+            </a:r>
+            <a:endParaRPr lang="en-US" sz="1600" dirty="0"/>
+          </a:p>
+        </p:txBody>
+      </p:sp>
+      <p:sp>
+        <p:nvSpPr>
+          <p:cNvPr id="4" name="texto-106"/>
+          <p:cNvSpPr txBox="1"/>
+          <p:nvPr/>
+        </p:nvSpPr>
+        <p:spPr>
+          <a:xfrm>
+            <a:off x="4846320" y="2377440"/>
+            <a:ext cx="4937760" cy="411480"/>
+          </a:xfrm>
+          <a:prstGeom prst="rect">
+            <a:avLst/>
+          </a:prstGeom>
+          <a:noFill/>
+          <a:ln/>
+        </p:spPr>
+        <p:txBody>
+          <a:bodyPr wrap="square" lIns="0" tIns="0" rIns="0" bIns="0" rtlCol="0" anchor="t"/>
+          <a:lstStyle/>
+          <a:p>
+            <a:pPr indent="0" marL="0">
+              <a:buNone/>
+            </a:pPr>
+            <a:r>
+              <a:rPr lang="en-US" sz="1600" dirty="0">
+                <a:solidFill>
+                  <a:schemeClr val="bg1"/>
+                </a:solidFill>
+              </a:rPr>
+              <a:t>Landing</a:t>
+            </a:r>
+            <a:endParaRPr lang="en-US" sz="1600" dirty="0"/>
+          </a:p>
+        </p:txBody>
+      </p:sp>
+      <p:sp>
+        <p:nvSpPr>
+          <p:cNvPr id="5" name="texto-107"/>
+          <p:cNvSpPr txBox="1"/>
+          <p:nvPr/>
+        </p:nvSpPr>
+        <p:spPr>
+          <a:xfrm>
+            <a:off x="731520" y="2926080"/>
+            <a:ext cx="4023360" cy="411480"/>
+          </a:xfrm>
+          <a:prstGeom prst="rect">
+            <a:avLst/>
+          </a:prstGeom>
+          <a:noFill/>
+          <a:ln/>
+        </p:spPr>
+        <p:txBody>
+          <a:bodyPr wrap="square" lIns="0" tIns="0" rIns="0" bIns="0" rtlCol="0" anchor="t"/>
+          <a:lstStyle/>
+          <a:p>
+            <a:pPr indent="0" marL="0">
+              <a:buNone/>
+            </a:pPr>
+            <a:r>
+              <a:rPr lang="en-US" sz="1600" dirty="0">
+                <a:solidFill>
+                  <a:schemeClr val="accent3"/>
+                </a:solidFill>
+                <a:latin typeface="IBM Plex Mono" pitchFamily="34" charset="0"/>
+                <a:ea typeface="IBM Plex Mono" pitchFamily="34" charset="-122"/>
+                <a:cs typeface="IBM Plex Mono" pitchFamily="34" charset="-120"/>
+              </a:rPr>
+              <a:t>/o/7KQ2X</a:t>
+            </a:r>
+            <a:endParaRPr lang="en-US" sz="1600" dirty="0"/>
+          </a:p>
+        </p:txBody>
+      </p:sp>
+      <p:sp>
+        <p:nvSpPr>
+          <p:cNvPr id="6" name="texto-108"/>
+          <p:cNvSpPr txBox="1"/>
+          <p:nvPr/>
+        </p:nvSpPr>
+        <p:spPr>
+          <a:xfrm>
+            <a:off x="4846320" y="2926080"/>
+            <a:ext cx="4937760" cy="411480"/>
+          </a:xfrm>
+          <a:prstGeom prst="rect">
+            <a:avLst/>
+          </a:prstGeom>
+          <a:noFill/>
+          <a:ln/>
+        </p:spPr>
+        <p:txBody>
+          <a:bodyPr wrap="square" lIns="0" tIns="0" rIns="0" bIns="0" rtlCol="0" anchor="t"/>
+          <a:lstStyle/>
+          <a:p>
+            <a:pPr indent="0" marL="0">
+              <a:buNone/>
+            </a:pPr>
+            <a:r>
+              <a:rPr lang="en-US" sz="1600" dirty="0">
+                <a:solidFill>
+                  <a:schemeClr val="bg1"/>
+                </a:solidFill>
+              </a:rPr>
+              <a:t>Página de una obra (código de dueño 4K7P-9QX2)</a:t>
+            </a:r>
+            <a:endParaRPr lang="en-US" sz="1600" dirty="0"/>
+          </a:p>
+        </p:txBody>
+      </p:sp>
+      <p:sp>
+        <p:nvSpPr>
+          <p:cNvPr id="7" name="texto-109"/>
+          <p:cNvSpPr txBox="1"/>
+          <p:nvPr/>
+        </p:nvSpPr>
+        <p:spPr>
+          <a:xfrm>
+            <a:off x="731520" y="3474720"/>
+            <a:ext cx="4023360" cy="411480"/>
+          </a:xfrm>
+          <a:prstGeom prst="rect">
+            <a:avLst/>
+          </a:prstGeom>
+          <a:noFill/>
+          <a:ln/>
+        </p:spPr>
+        <p:txBody>
+          <a:bodyPr wrap="square" lIns="0" tIns="0" rIns="0" bIns="0" rtlCol="0" anchor="t"/>
+          <a:lstStyle/>
+          <a:p>
+            <a:pPr indent="0" marL="0">
+              <a:buNone/>
+            </a:pPr>
+            <a:r>
+              <a:rPr lang="en-US" sz="1600" dirty="0">
+                <a:solidFill>
+                  <a:schemeClr val="accent3"/>
+                </a:solidFill>
+                <a:latin typeface="IBM Plex Mono" pitchFamily="34" charset="0"/>
+                <a:ea typeface="IBM Plex Mono" pitchFamily="34" charset="-122"/>
+                <a:cs typeface="IBM Plex Mono" pitchFamily="34" charset="-120"/>
+              </a:rPr>
+              <a:t>/panel</a:t>
+            </a:r>
+            <a:endParaRPr lang="en-US" sz="1600" dirty="0"/>
+          </a:p>
+        </p:txBody>
+      </p:sp>
+      <p:sp>
+        <p:nvSpPr>
+          <p:cNvPr id="8" name="texto-110"/>
+          <p:cNvSpPr txBox="1"/>
+          <p:nvPr/>
+        </p:nvSpPr>
+        <p:spPr>
+          <a:xfrm>
+            <a:off x="4846320" y="3474720"/>
+            <a:ext cx="4937760" cy="411480"/>
+          </a:xfrm>
+          <a:prstGeom prst="rect">
+            <a:avLst/>
+          </a:prstGeom>
+          <a:noFill/>
+          <a:ln/>
+        </p:spPr>
+        <p:txBody>
+          <a:bodyPr wrap="square" lIns="0" tIns="0" rIns="0" bIns="0" rtlCol="0" anchor="t"/>
+          <a:lstStyle/>
+          <a:p>
+            <a:pPr indent="0" marL="0">
+              <a:buNone/>
+            </a:pPr>
+            <a:r>
+              <a:rPr lang="en-US" sz="1600" dirty="0">
+                <a:solidFill>
+                  <a:schemeClr val="bg1"/>
+                </a:solidFill>
+              </a:rPr>
+              <a:t>Panel del artista</a:t>
+            </a:r>
+            <a:endParaRPr lang="en-US" sz="1600" dirty="0"/>
+          </a:p>
+        </p:txBody>
+      </p:sp>
+      <p:sp>
+        <p:nvSpPr>
+          <p:cNvPr id="9" name="texto-111"/>
+          <p:cNvSpPr txBox="1"/>
+          <p:nvPr/>
+        </p:nvSpPr>
+        <p:spPr>
+          <a:xfrm>
+            <a:off x="731520" y="4023360"/>
+            <a:ext cx="4023360" cy="411480"/>
+          </a:xfrm>
+          <a:prstGeom prst="rect">
+            <a:avLst/>
+          </a:prstGeom>
+          <a:noFill/>
+          <a:ln/>
+        </p:spPr>
+        <p:txBody>
+          <a:bodyPr wrap="square" lIns="0" tIns="0" rIns="0" bIns="0" rtlCol="0" anchor="t"/>
+          <a:lstStyle/>
+          <a:p>
+            <a:pPr indent="0" marL="0">
+              <a:buNone/>
+            </a:pPr>
+            <a:r>
+              <a:rPr lang="en-US" sz="1600" dirty="0">
+                <a:solidFill>
+                  <a:schemeClr val="accent3"/>
+                </a:solidFill>
+                <a:latin typeface="IBM Plex Mono" pitchFamily="34" charset="0"/>
+                <a:ea typeface="IBM Plex Mono" pitchFamily="34" charset="-122"/>
+                <a:cs typeface="IBM Plex Mono" pitchFamily="34" charset="-120"/>
+              </a:rPr>
+              <a:t>/jose-luis</a:t>
+            </a:r>
+            <a:endParaRPr lang="en-US" sz="1600" dirty="0"/>
+          </a:p>
+        </p:txBody>
+      </p:sp>
+      <p:sp>
+        <p:nvSpPr>
+          <p:cNvPr id="10" name="texto-112"/>
+          <p:cNvSpPr txBox="1"/>
+          <p:nvPr/>
+        </p:nvSpPr>
+        <p:spPr>
+          <a:xfrm>
+            <a:off x="4846320" y="4023360"/>
+            <a:ext cx="4937760" cy="411480"/>
+          </a:xfrm>
+          <a:prstGeom prst="rect">
+            <a:avLst/>
+          </a:prstGeom>
+          <a:noFill/>
+          <a:ln/>
+        </p:spPr>
+        <p:txBody>
+          <a:bodyPr wrap="square" lIns="0" tIns="0" rIns="0" bIns="0" rtlCol="0" anchor="t"/>
+          <a:lstStyle/>
+          <a:p>
+            <a:pPr indent="0" marL="0">
+              <a:buNone/>
+            </a:pPr>
+            <a:r>
+              <a:rPr lang="en-US" sz="1600" dirty="0">
+                <a:solidFill>
+                  <a:schemeClr val="bg1"/>
+                </a:solidFill>
+              </a:rPr>
+              <a:t>Demo para José Luis Malo</a:t>
+            </a:r>
+            <a:endParaRPr lang="en-US" sz="1600" dirty="0"/>
+          </a:p>
+        </p:txBody>
+      </p:sp>
+      <p:sp>
+        <p:nvSpPr>
+          <p:cNvPr id="11" name="texto-113"/>
+          <p:cNvSpPr txBox="1"/>
+          <p:nvPr/>
+        </p:nvSpPr>
+        <p:spPr>
+          <a:xfrm>
+            <a:off x="731520" y="4572000"/>
+            <a:ext cx="4023360" cy="411480"/>
+          </a:xfrm>
+          <a:prstGeom prst="rect">
+            <a:avLst/>
+          </a:prstGeom>
+          <a:noFill/>
+          <a:ln/>
+        </p:spPr>
+        <p:txBody>
+          <a:bodyPr wrap="square" lIns="0" tIns="0" rIns="0" bIns="0" rtlCol="0" anchor="t"/>
+          <a:lstStyle/>
+          <a:p>
+            <a:pPr indent="0" marL="0">
+              <a:buNone/>
+            </a:pPr>
+            <a:r>
+              <a:rPr lang="en-US" sz="1600" dirty="0">
+                <a:solidFill>
+                  <a:schemeClr val="accent3"/>
+                </a:solidFill>
+                <a:latin typeface="IBM Plex Mono" pitchFamily="34" charset="0"/>
+                <a:ea typeface="IBM Plex Mono" pitchFamily="34" charset="-122"/>
+                <a:cs typeface="IBM Plex Mono" pitchFamily="34" charset="-120"/>
+              </a:rPr>
+              <a:t>/recorrido?para=Nombre</a:t>
+            </a:r>
+            <a:endParaRPr lang="en-US" sz="1600" dirty="0"/>
+          </a:p>
+        </p:txBody>
+      </p:sp>
+      <p:sp>
+        <p:nvSpPr>
+          <p:cNvPr id="12" name="texto-114"/>
+          <p:cNvSpPr txBox="1"/>
+          <p:nvPr/>
+        </p:nvSpPr>
+        <p:spPr>
+          <a:xfrm>
+            <a:off x="4846320" y="4572000"/>
+            <a:ext cx="4937760" cy="411480"/>
+          </a:xfrm>
+          <a:prstGeom prst="rect">
+            <a:avLst/>
+          </a:prstGeom>
+          <a:noFill/>
+          <a:ln/>
+        </p:spPr>
+        <p:txBody>
+          <a:bodyPr wrap="square" lIns="0" tIns="0" rIns="0" bIns="0" rtlCol="0" anchor="t"/>
+          <a:lstStyle/>
+          <a:p>
+            <a:pPr indent="0" marL="0">
+              <a:buNone/>
+            </a:pPr>
+            <a:r>
+              <a:rPr lang="en-US" sz="1600" dirty="0">
+                <a:solidFill>
+                  <a:schemeClr val="bg1"/>
+                </a:solidFill>
+              </a:rPr>
+              <a:t>Recorrido de 5 minutos</a:t>
+            </a:r>
+            <a:endParaRPr lang="en-US" sz="1600" dirty="0"/>
+          </a:p>
+        </p:txBody>
+      </p:sp>
+      <p:sp>
+        <p:nvSpPr>
+          <p:cNvPr id="13" name="texto-115"/>
+          <p:cNvSpPr txBox="1"/>
+          <p:nvPr/>
+        </p:nvSpPr>
+        <p:spPr>
+          <a:xfrm>
+            <a:off x="731520" y="5120640"/>
+            <a:ext cx="4023360" cy="411480"/>
+          </a:xfrm>
+          <a:prstGeom prst="rect">
+            <a:avLst/>
+          </a:prstGeom>
+          <a:noFill/>
+          <a:ln/>
+        </p:spPr>
+        <p:txBody>
+          <a:bodyPr wrap="square" lIns="0" tIns="0" rIns="0" bIns="0" rtlCol="0" anchor="t"/>
+          <a:lstStyle/>
+          <a:p>
+            <a:pPr indent="0" marL="0">
+              <a:buNone/>
+            </a:pPr>
+            <a:r>
+              <a:rPr lang="en-US" sz="1600" dirty="0">
+                <a:solidFill>
+                  <a:schemeClr val="accent3"/>
+                </a:solidFill>
+                <a:latin typeface="IBM Plex Mono" pitchFamily="34" charset="0"/>
+                <a:ea typeface="IBM Plex Mono" pitchFamily="34" charset="-122"/>
+                <a:cs typeface="IBM Plex Mono" pitchFamily="34" charset="-120"/>
+              </a:rPr>
+              <a:t>/marca</a:t>
+            </a:r>
+            <a:endParaRPr lang="en-US" sz="1600" dirty="0"/>
+          </a:p>
+        </p:txBody>
+      </p:sp>
+      <p:sp>
+        <p:nvSpPr>
+          <p:cNvPr id="14" name="texto-116"/>
+          <p:cNvSpPr txBox="1"/>
+          <p:nvPr/>
+        </p:nvSpPr>
+        <p:spPr>
+          <a:xfrm>
+            <a:off x="4846320" y="5120640"/>
+            <a:ext cx="4937760" cy="411480"/>
+          </a:xfrm>
+          <a:prstGeom prst="rect">
+            <a:avLst/>
+          </a:prstGeom>
+          <a:noFill/>
+          <a:ln/>
+        </p:spPr>
+        <p:txBody>
+          <a:bodyPr wrap="square" lIns="0" tIns="0" rIns="0" bIns="0" rtlCol="0" anchor="t"/>
+          <a:lstStyle/>
+          <a:p>
+            <a:pPr indent="0" marL="0">
+              <a:buNone/>
+            </a:pPr>
+            <a:r>
+              <a:rPr lang="en-US" sz="1600" dirty="0">
+                <a:solidFill>
+                  <a:schemeClr val="bg1"/>
+                </a:solidFill>
+              </a:rPr>
+              <a:t>Kit de marca y Punto</a:t>
+            </a:r>
+            <a:endParaRPr lang="en-US" sz="1600" dirty="0"/>
+          </a:p>
+        </p:txBody>
+      </p:sp>
+      <p:sp>
+        <p:nvSpPr>
+          <p:cNvPr id="15" name="texto-117"/>
+          <p:cNvSpPr txBox="1"/>
+          <p:nvPr/>
+        </p:nvSpPr>
+        <p:spPr>
+          <a:xfrm>
+            <a:off x="731520" y="5669280"/>
+            <a:ext cx="4023360" cy="411480"/>
+          </a:xfrm>
+          <a:prstGeom prst="rect">
+            <a:avLst/>
+          </a:prstGeom>
+          <a:noFill/>
+          <a:ln/>
+        </p:spPr>
+        <p:txBody>
+          <a:bodyPr wrap="square" lIns="0" tIns="0" rIns="0" bIns="0" rtlCol="0" anchor="t"/>
+          <a:lstStyle/>
+          <a:p>
+            <a:pPr indent="0" marL="0">
+              <a:buNone/>
+            </a:pPr>
+            <a:r>
+              <a:rPr lang="en-US" sz="1600" dirty="0">
+                <a:solidFill>
+                  <a:schemeClr val="accent3"/>
+                </a:solidFill>
+                <a:latin typeface="IBM Plex Mono" pitchFamily="34" charset="0"/>
+                <a:ea typeface="IBM Plex Mono" pitchFamily="34" charset="-122"/>
+                <a:cs typeface="IBM Plex Mono" pitchFamily="34" charset="-120"/>
+              </a:rPr>
+              <a:t>/imprimir/7KQ2X</a:t>
+            </a:r>
+            <a:endParaRPr lang="en-US" sz="1600" dirty="0"/>
+          </a:p>
+        </p:txBody>
+      </p:sp>
+      <p:sp>
+        <p:nvSpPr>
+          <p:cNvPr id="16" name="texto-118"/>
+          <p:cNvSpPr txBox="1"/>
+          <p:nvPr/>
+        </p:nvSpPr>
+        <p:spPr>
+          <a:xfrm>
+            <a:off x="4846320" y="5669280"/>
+            <a:ext cx="4937760" cy="411480"/>
+          </a:xfrm>
+          <a:prstGeom prst="rect">
+            <a:avLst/>
+          </a:prstGeom>
+          <a:noFill/>
+          <a:ln/>
+        </p:spPr>
+        <p:txBody>
+          <a:bodyPr wrap="square" lIns="0" tIns="0" rIns="0" bIns="0" rtlCol="0" anchor="t"/>
+          <a:lstStyle/>
+          <a:p>
+            <a:pPr indent="0" marL="0">
+              <a:buNone/>
+            </a:pPr>
+            <a:r>
+              <a:rPr lang="en-US" sz="1600" dirty="0">
+                <a:solidFill>
+                  <a:schemeClr val="bg1"/>
+                </a:solidFill>
+              </a:rPr>
+              <a:t>Piezas en tamaño real</a:t>
+            </a:r>
+            <a:endParaRPr lang="en-US" sz="1600" dirty="0"/>
+          </a:p>
+        </p:txBody>
+      </p:sp>
+      <p:pic>
+        <p:nvPicPr>
+          <p:cNvPr id="17" name="imagen-119" descr="punto-feliz.png">    </p:cNvPr>
+          <p:cNvPicPr>
+            <a:picLocks noChangeAspect="1"/>
+          </p:cNvPicPr>
+          <p:nvPr/>
+        </p:nvPicPr>
+        <p:blipFill>
+          <a:blip r:embed="rId1"/>
+          <a:stretch>
+            <a:fillRect/>
+          </a:stretch>
+        </p:blipFill>
+        <p:spPr>
+          <a:xfrm>
+            <a:off x="10093627" y="4663440"/>
+            <a:ext cx="1484026" cy="1645920"/>
           </a:xfrm>
           <a:prstGeom prst="rect">
             <a:avLst/>
@@ -4226,7 +4785,7 @@
       </p:sp>
       <p:sp>
         <p:nvSpPr>
-          <p:cNvPr id="4" name="panel-1"/>
+          <p:cNvPr id="4" name="panel-2"/>
           <p:cNvSpPr/>
           <p:nvPr/>
         </p:nvSpPr>
@@ -4253,7 +4812,7 @@
       </p:sp>
       <p:pic>
         <p:nvPicPr>
-          <p:cNvPr id="5" name="imagen-2" descr="isotipo-color.png">    </p:cNvPr>
+          <p:cNvPr id="5" name="imagen-3" descr="isotipo-color.png">    </p:cNvPr>
           <p:cNvPicPr>
             <a:picLocks noChangeAspect="1"/>
           </p:cNvPicPr>
@@ -4277,7 +4836,7 @@
       </p:pic>
       <p:sp>
         <p:nvSpPr>
-          <p:cNvPr id="6" name="texto-3"/>
+          <p:cNvPr id="6" name="texto-4"/>
           <p:cNvSpPr txBox="1"/>
           <p:nvPr/>
         </p:nvSpPr>
@@ -4313,7 +4872,7 @@
       </p:sp>
       <p:sp>
         <p:nvSpPr>
-          <p:cNvPr id="7" name="panel-4"/>
+          <p:cNvPr id="7" name="panel-5"/>
           <p:cNvSpPr/>
           <p:nvPr/>
         </p:nvSpPr>
@@ -4340,7 +4899,7 @@
       </p:sp>
       <p:pic>
         <p:nvPicPr>
-          <p:cNvPr id="8" name="imagen-5" descr="isotipo-claro.png">    </p:cNvPr>
+          <p:cNvPr id="8" name="imagen-6" descr="isotipo-claro.png">    </p:cNvPr>
           <p:cNvPicPr>
             <a:picLocks noChangeAspect="1"/>
           </p:cNvPicPr>
@@ -4364,7 +4923,7 @@
       </p:pic>
       <p:sp>
         <p:nvSpPr>
-          <p:cNvPr id="9" name="texto-6"/>
+          <p:cNvPr id="9" name="texto-7"/>
           <p:cNvSpPr txBox="1"/>
           <p:nvPr/>
         </p:nvSpPr>
@@ -4400,7 +4959,7 @@
       </p:sp>
       <p:sp>
         <p:nvSpPr>
-          <p:cNvPr id="10" name="panel-7"/>
+          <p:cNvPr id="10" name="panel-8"/>
           <p:cNvSpPr/>
           <p:nvPr/>
         </p:nvSpPr>
@@ -4427,7 +4986,7 @@
       </p:sp>
       <p:pic>
         <p:nvPicPr>
-          <p:cNvPr id="11" name="imagen-8" descr="isotipo-tinta.png">    </p:cNvPr>
+          <p:cNvPr id="11" name="imagen-9" descr="isotipo-tinta.png">    </p:cNvPr>
           <p:cNvPicPr>
             <a:picLocks noChangeAspect="1"/>
           </p:cNvPicPr>
@@ -4451,7 +5010,7 @@
       </p:pic>
       <p:sp>
         <p:nvSpPr>
-          <p:cNvPr id="12" name="texto-9"/>
+          <p:cNvPr id="12" name="texto-10"/>
           <p:cNvSpPr txBox="1"/>
           <p:nvPr/>
         </p:nvSpPr>
@@ -4487,7 +5046,7 @@
       </p:sp>
       <p:sp>
         <p:nvSpPr>
-          <p:cNvPr id="13" name="texto-10"/>
+          <p:cNvPr id="13" name="texto-11"/>
           <p:cNvSpPr txBox="1"/>
           <p:nvPr/>
         </p:nvSpPr>
@@ -4675,7 +5234,7 @@
       </p:sp>
       <p:sp>
         <p:nvSpPr>
-          <p:cNvPr id="4" name="color-11"/>
+          <p:cNvPr id="4" name="color-12"/>
           <p:cNvSpPr/>
           <p:nvPr/>
         </p:nvSpPr>
@@ -4702,7 +5261,7 @@
       </p:sp>
       <p:sp>
         <p:nvSpPr>
-          <p:cNvPr id="5" name="texto-12"/>
+          <p:cNvPr id="5" name="texto-13"/>
           <p:cNvSpPr txBox="1"/>
           <p:nvPr/>
         </p:nvSpPr>
@@ -4755,7 +5314,7 @@
       </p:sp>
       <p:sp>
         <p:nvSpPr>
-          <p:cNvPr id="6" name="texto-13"/>
+          <p:cNvPr id="6" name="texto-14"/>
           <p:cNvSpPr txBox="1"/>
           <p:nvPr/>
         </p:nvSpPr>
@@ -4791,7 +5350,7 @@
       </p:sp>
       <p:sp>
         <p:nvSpPr>
-          <p:cNvPr id="7" name="color-14"/>
+          <p:cNvPr id="7" name="color-15"/>
           <p:cNvSpPr/>
           <p:nvPr/>
         </p:nvSpPr>
@@ -4818,7 +5377,7 @@
       </p:sp>
       <p:sp>
         <p:nvSpPr>
-          <p:cNvPr id="8" name="texto-15"/>
+          <p:cNvPr id="8" name="texto-16"/>
           <p:cNvSpPr txBox="1"/>
           <p:nvPr/>
         </p:nvSpPr>
@@ -4871,7 +5430,7 @@
       </p:sp>
       <p:sp>
         <p:nvSpPr>
-          <p:cNvPr id="9" name="texto-16"/>
+          <p:cNvPr id="9" name="texto-17"/>
           <p:cNvSpPr txBox="1"/>
           <p:nvPr/>
         </p:nvSpPr>
@@ -4907,7 +5466,7 @@
       </p:sp>
       <p:sp>
         <p:nvSpPr>
-          <p:cNvPr id="10" name="color-17"/>
+          <p:cNvPr id="10" name="color-18"/>
           <p:cNvSpPr/>
           <p:nvPr/>
         </p:nvSpPr>
@@ -4934,7 +5493,7 @@
       </p:sp>
       <p:sp>
         <p:nvSpPr>
-          <p:cNvPr id="11" name="texto-18"/>
+          <p:cNvPr id="11" name="texto-19"/>
           <p:cNvSpPr txBox="1"/>
           <p:nvPr/>
         </p:nvSpPr>
@@ -4987,7 +5546,7 @@
       </p:sp>
       <p:sp>
         <p:nvSpPr>
-          <p:cNvPr id="12" name="texto-19"/>
+          <p:cNvPr id="12" name="texto-20"/>
           <p:cNvSpPr txBox="1"/>
           <p:nvPr/>
         </p:nvSpPr>
@@ -5023,7 +5582,7 @@
       </p:sp>
       <p:sp>
         <p:nvSpPr>
-          <p:cNvPr id="13" name="color-20"/>
+          <p:cNvPr id="13" name="color-21"/>
           <p:cNvSpPr/>
           <p:nvPr/>
         </p:nvSpPr>
@@ -5050,7 +5609,7 @@
       </p:sp>
       <p:sp>
         <p:nvSpPr>
-          <p:cNvPr id="14" name="texto-21"/>
+          <p:cNvPr id="14" name="texto-22"/>
           <p:cNvSpPr txBox="1"/>
           <p:nvPr/>
         </p:nvSpPr>
@@ -5103,7 +5662,7 @@
       </p:sp>
       <p:sp>
         <p:nvSpPr>
-          <p:cNvPr id="15" name="texto-22"/>
+          <p:cNvPr id="15" name="texto-23"/>
           <p:cNvSpPr txBox="1"/>
           <p:nvPr/>
         </p:nvSpPr>
@@ -5139,7 +5698,7 @@
       </p:sp>
       <p:sp>
         <p:nvSpPr>
-          <p:cNvPr id="16" name="color-23"/>
+          <p:cNvPr id="16" name="color-24"/>
           <p:cNvSpPr/>
           <p:nvPr/>
         </p:nvSpPr>
@@ -5166,7 +5725,7 @@
       </p:sp>
       <p:sp>
         <p:nvSpPr>
-          <p:cNvPr id="17" name="texto-24"/>
+          <p:cNvPr id="17" name="texto-25"/>
           <p:cNvSpPr txBox="1"/>
           <p:nvPr/>
         </p:nvSpPr>
@@ -5219,7 +5778,7 @@
       </p:sp>
       <p:sp>
         <p:nvSpPr>
-          <p:cNvPr id="18" name="texto-25"/>
+          <p:cNvPr id="18" name="texto-26"/>
           <p:cNvSpPr txBox="1"/>
           <p:nvPr/>
         </p:nvSpPr>
@@ -5255,7 +5814,7 @@
       </p:sp>
       <p:sp>
         <p:nvSpPr>
-          <p:cNvPr id="19" name="color-26"/>
+          <p:cNvPr id="19" name="color-27"/>
           <p:cNvSpPr/>
           <p:nvPr/>
         </p:nvSpPr>
@@ -5282,7 +5841,7 @@
       </p:sp>
       <p:sp>
         <p:nvSpPr>
-          <p:cNvPr id="20" name="texto-27"/>
+          <p:cNvPr id="20" name="texto-28"/>
           <p:cNvSpPr txBox="1"/>
           <p:nvPr/>
         </p:nvSpPr>
@@ -5335,7 +5894,7 @@
       </p:sp>
       <p:sp>
         <p:nvSpPr>
-          <p:cNvPr id="21" name="texto-28"/>
+          <p:cNvPr id="21" name="texto-29"/>
           <p:cNvSpPr txBox="1"/>
           <p:nvPr/>
         </p:nvSpPr>
@@ -5523,7 +6082,7 @@
       </p:sp>
       <p:sp>
         <p:nvSpPr>
-          <p:cNvPr id="4" name="linea-29"/>
+          <p:cNvPr id="4" name="linea-30"/>
           <p:cNvSpPr/>
           <p:nvPr/>
         </p:nvSpPr>
@@ -5546,7 +6105,7 @@
       </p:sp>
       <p:sp>
         <p:nvSpPr>
-          <p:cNvPr id="5" name="texto-30"/>
+          <p:cNvPr id="5" name="texto-31"/>
           <p:cNvSpPr txBox="1"/>
           <p:nvPr/>
         </p:nvSpPr>
@@ -5585,7 +6144,7 @@
       </p:sp>
       <p:sp>
         <p:nvSpPr>
-          <p:cNvPr id="6" name="texto-31"/>
+          <p:cNvPr id="6" name="texto-32"/>
           <p:cNvSpPr txBox="1"/>
           <p:nvPr/>
         </p:nvSpPr>
@@ -5621,7 +6180,7 @@
       </p:sp>
       <p:sp>
         <p:nvSpPr>
-          <p:cNvPr id="7" name="texto-32"/>
+          <p:cNvPr id="7" name="texto-33"/>
           <p:cNvSpPr txBox="1"/>
           <p:nvPr/>
         </p:nvSpPr>
@@ -5660,7 +6219,7 @@
       </p:sp>
       <p:sp>
         <p:nvSpPr>
-          <p:cNvPr id="8" name="linea-33"/>
+          <p:cNvPr id="8" name="linea-34"/>
           <p:cNvSpPr/>
           <p:nvPr/>
         </p:nvSpPr>
@@ -5683,7 +6242,7 @@
       </p:sp>
       <p:sp>
         <p:nvSpPr>
-          <p:cNvPr id="9" name="texto-34"/>
+          <p:cNvPr id="9" name="texto-35"/>
           <p:cNvSpPr txBox="1"/>
           <p:nvPr/>
         </p:nvSpPr>
@@ -5722,7 +6281,7 @@
       </p:sp>
       <p:sp>
         <p:nvSpPr>
-          <p:cNvPr id="10" name="texto-35"/>
+          <p:cNvPr id="10" name="texto-36"/>
           <p:cNvSpPr txBox="1"/>
           <p:nvPr/>
         </p:nvSpPr>
@@ -5758,7 +6317,7 @@
       </p:sp>
       <p:sp>
         <p:nvSpPr>
-          <p:cNvPr id="11" name="texto-36"/>
+          <p:cNvPr id="11" name="texto-37"/>
           <p:cNvSpPr txBox="1"/>
           <p:nvPr/>
         </p:nvSpPr>
@@ -5794,7 +6353,7 @@
       </p:sp>
       <p:sp>
         <p:nvSpPr>
-          <p:cNvPr id="12" name="linea-37"/>
+          <p:cNvPr id="12" name="linea-38"/>
           <p:cNvSpPr/>
           <p:nvPr/>
         </p:nvSpPr>
@@ -5817,7 +6376,7 @@
       </p:sp>
       <p:sp>
         <p:nvSpPr>
-          <p:cNvPr id="13" name="texto-38"/>
+          <p:cNvPr id="13" name="texto-39"/>
           <p:cNvSpPr txBox="1"/>
           <p:nvPr/>
         </p:nvSpPr>
@@ -5856,7 +6415,7 @@
       </p:sp>
       <p:sp>
         <p:nvSpPr>
-          <p:cNvPr id="14" name="texto-39"/>
+          <p:cNvPr id="14" name="texto-40"/>
           <p:cNvSpPr txBox="1"/>
           <p:nvPr/>
         </p:nvSpPr>
@@ -5892,7 +6451,7 @@
       </p:sp>
       <p:sp>
         <p:nvSpPr>
-          <p:cNvPr id="15" name="texto-40"/>
+          <p:cNvPr id="15" name="texto-41"/>
           <p:cNvSpPr txBox="1"/>
           <p:nvPr/>
         </p:nvSpPr>
@@ -6083,7 +6642,7 @@
       </p:sp>
       <p:pic>
         <p:nvPicPr>
-          <p:cNvPr id="4" name="imagen-41" descr="punto-tranquilo.png">    </p:cNvPr>
+          <p:cNvPr id="4" name="imagen-42" descr="punto-tranquilo.png">    </p:cNvPr>
           <p:cNvPicPr>
             <a:picLocks noChangeAspect="1"/>
           </p:cNvPicPr>
@@ -6097,8 +6656,8 @@
         </p:blipFill>
         <p:spPr>
           <a:xfrm>
-            <a:off x="910590" y="1691640"/>
-            <a:ext cx="1927860" cy="2103120"/>
+            <a:off x="926392" y="1691640"/>
+            <a:ext cx="1896256" cy="2103120"/>
           </a:xfrm>
           <a:prstGeom prst="rect">
             <a:avLst/>
@@ -6107,7 +6666,7 @@
       </p:pic>
       <p:sp>
         <p:nvSpPr>
-          <p:cNvPr id="5" name="texto-42"/>
+          <p:cNvPr id="5" name="texto-43"/>
           <p:cNvSpPr txBox="1"/>
           <p:nvPr/>
         </p:nvSpPr>
@@ -6143,7 +6702,7 @@
       </p:sp>
       <p:sp>
         <p:nvSpPr>
-          <p:cNvPr id="6" name="texto-43"/>
+          <p:cNvPr id="6" name="texto-44"/>
           <p:cNvSpPr txBox="1"/>
           <p:nvPr/>
         </p:nvSpPr>
@@ -6179,7 +6738,7 @@
       </p:sp>
       <p:pic>
         <p:nvPicPr>
-          <p:cNvPr id="7" name="imagen-44" descr="punto-toque.png">    </p:cNvPr>
+          <p:cNvPr id="7" name="imagen-45" descr="punto-toque.png">    </p:cNvPr>
           <p:cNvPicPr>
             <a:picLocks noChangeAspect="1"/>
           </p:cNvPicPr>
@@ -6193,8 +6752,8 @@
         </p:blipFill>
         <p:spPr>
           <a:xfrm>
-            <a:off x="3745230" y="1691640"/>
-            <a:ext cx="1927860" cy="2103120"/>
+            <a:off x="3761032" y="1691640"/>
+            <a:ext cx="1896256" cy="2103120"/>
           </a:xfrm>
           <a:prstGeom prst="rect">
             <a:avLst/>
@@ -6203,7 +6762,7 @@
       </p:pic>
       <p:sp>
         <p:nvSpPr>
-          <p:cNvPr id="8" name="texto-45"/>
+          <p:cNvPr id="8" name="texto-46"/>
           <p:cNvSpPr txBox="1"/>
           <p:nvPr/>
         </p:nvSpPr>
@@ -6239,7 +6798,7 @@
       </p:sp>
       <p:sp>
         <p:nvSpPr>
-          <p:cNvPr id="9" name="texto-46"/>
+          <p:cNvPr id="9" name="texto-47"/>
           <p:cNvSpPr txBox="1"/>
           <p:nvPr/>
         </p:nvSpPr>
@@ -6275,7 +6834,7 @@
       </p:sp>
       <p:pic>
         <p:nvPicPr>
-          <p:cNvPr id="10" name="imagen-47" descr="punto-feliz.png">    </p:cNvPr>
+          <p:cNvPr id="10" name="imagen-48" descr="punto-feliz.png">    </p:cNvPr>
           <p:cNvPicPr>
             <a:picLocks noChangeAspect="1"/>
           </p:cNvPicPr>
@@ -6289,8 +6848,8 @@
         </p:blipFill>
         <p:spPr>
           <a:xfrm>
-            <a:off x="6579870" y="1691640"/>
-            <a:ext cx="1927860" cy="2103120"/>
+            <a:off x="6595672" y="1691640"/>
+            <a:ext cx="1896256" cy="2103120"/>
           </a:xfrm>
           <a:prstGeom prst="rect">
             <a:avLst/>
@@ -6299,7 +6858,7 @@
       </p:pic>
       <p:sp>
         <p:nvSpPr>
-          <p:cNvPr id="11" name="texto-48"/>
+          <p:cNvPr id="11" name="texto-49"/>
           <p:cNvSpPr txBox="1"/>
           <p:nvPr/>
         </p:nvSpPr>
@@ -6335,7 +6894,7 @@
       </p:sp>
       <p:sp>
         <p:nvSpPr>
-          <p:cNvPr id="12" name="texto-49"/>
+          <p:cNvPr id="12" name="texto-50"/>
           <p:cNvSpPr txBox="1"/>
           <p:nvPr/>
         </p:nvSpPr>
@@ -6371,7 +6930,7 @@
       </p:sp>
       <p:pic>
         <p:nvPicPr>
-          <p:cNvPr id="13" name="imagen-50" descr="punto-duda.png">    </p:cNvPr>
+          <p:cNvPr id="13" name="imagen-51" descr="punto-duda.png">    </p:cNvPr>
           <p:cNvPicPr>
             <a:picLocks noChangeAspect="1"/>
           </p:cNvPicPr>
@@ -6385,8 +6944,8 @@
         </p:blipFill>
         <p:spPr>
           <a:xfrm>
-            <a:off x="9388736" y="1691640"/>
-            <a:ext cx="1979407" cy="2103120"/>
+            <a:off x="9430312" y="1691640"/>
+            <a:ext cx="1896256" cy="2103120"/>
           </a:xfrm>
           <a:prstGeom prst="rect">
             <a:avLst/>
@@ -6395,7 +6954,7 @@
       </p:pic>
       <p:sp>
         <p:nvSpPr>
-          <p:cNvPr id="14" name="texto-51"/>
+          <p:cNvPr id="14" name="texto-52"/>
           <p:cNvSpPr txBox="1"/>
           <p:nvPr/>
         </p:nvSpPr>
@@ -6431,7 +6990,7 @@
       </p:sp>
       <p:sp>
         <p:nvSpPr>
-          <p:cNvPr id="15" name="texto-52"/>
+          <p:cNvPr id="15" name="texto-53"/>
           <p:cNvSpPr txBox="1"/>
           <p:nvPr/>
         </p:nvSpPr>
@@ -6467,7 +7026,7 @@
       </p:sp>
       <p:sp>
         <p:nvSpPr>
-          <p:cNvPr id="16" name="texto-53"/>
+          <p:cNvPr id="16" name="texto-54"/>
           <p:cNvSpPr txBox="1"/>
           <p:nvPr/>
         </p:nvSpPr>
@@ -6495,7 +7054,7 @@
                   <a:schemeClr val="tx1"/>
                 </a:solidFill>
               </a:rPr>
-              <a:t>Hecho del producto, como el muñeco de Michelin está hecho de llantas: es el sello que va detrás del cuadro. Su contorno es el logo real y su chapita es el punto dorado. Nunca interrumpe y nunca sale en la página de la obra.</a:t>
+              <a:t>Hecho del producto, como el muñeco de Michelin está hecho de llantas: es el sello que va detrás del cuadro. De Clawd, la mascota de Claude Code, tomamos el color plano, los ojos sin boca y las patitas. Nunca interrumpe y nunca sale en la página de la obra.</a:t>
             </a:r>
             <a:endParaRPr lang="en-US" sz="1500" dirty="0"/>
           </a:p>
@@ -6655,7 +7214,7 @@
       </p:sp>
       <p:pic>
         <p:nvPicPr>
-          <p:cNvPr id="4" name="imagen-54" descr="piezas-BRAI-0001.png">    </p:cNvPr>
+          <p:cNvPr id="4" name="imagen-55" descr="piezas-BRAI-0001.png">    </p:cNvPr>
           <p:cNvPicPr>
             <a:picLocks noChangeAspect="1"/>
           </p:cNvPicPr>
@@ -6679,7 +7238,7 @@
       </p:pic>
       <p:sp>
         <p:nvSpPr>
-          <p:cNvPr id="5" name="texto-55"/>
+          <p:cNvPr id="5" name="texto-56"/>
           <p:cNvSpPr txBox="1"/>
           <p:nvPr/>
         </p:nvSpPr>
@@ -6804,7 +7363,7 @@
       </p:sp>
       <p:sp>
         <p:nvSpPr>
-          <p:cNvPr id="6" name="texto-56"/>
+          <p:cNvPr id="6" name="texto-57"/>
           <p:cNvSpPr txBox="1"/>
           <p:nvPr/>
         </p:nvSpPr>
@@ -6995,7 +7554,7 @@
       </p:sp>
       <p:pic>
         <p:nvPicPr>
-          <p:cNvPr id="4" name="imagen-57" descr="landing.png">    </p:cNvPr>
+          <p:cNvPr id="4" name="imagen-58" descr="landing.png">    </p:cNvPr>
           <p:cNvPicPr>
             <a:picLocks noChangeAspect="1"/>
           </p:cNvPicPr>
@@ -7019,7 +7578,7 @@
       </p:pic>
       <p:sp>
         <p:nvSpPr>
-          <p:cNvPr id="5" name="marco-58"/>
+          <p:cNvPr id="5" name="marco-59"/>
           <p:cNvSpPr/>
           <p:nvPr/>
         </p:nvSpPr>
@@ -7053,7 +7612,7 @@
       </p:sp>
       <p:pic>
         <p:nvPicPr>
-          <p:cNvPr id="6" name="pantalla-59" descr="landing.png">    </p:cNvPr>
+          <p:cNvPr id="6" name="pantalla-60" descr="landing.png">    </p:cNvPr>
           <p:cNvPicPr>
             <a:picLocks noChangeAspect="1"/>
           </p:cNvPicPr>
@@ -7229,7 +7788,7 @@
       </p:sp>
       <p:sp>
         <p:nvSpPr>
-          <p:cNvPr id="4" name="marco-60"/>
+          <p:cNvPr id="4" name="marco-61"/>
           <p:cNvSpPr/>
           <p:nvPr/>
         </p:nvSpPr>
@@ -7263,7 +7822,7 @@
       </p:sp>
       <p:pic>
         <p:nvPicPr>
-          <p:cNvPr id="5" name="pantalla-61" descr="obra.png">    </p:cNvPr>
+          <p:cNvPr id="5" name="pantalla-62" descr="obra.png">    </p:cNvPr>
           <p:cNvPicPr>
             <a:picLocks noChangeAspect="1"/>
           </p:cNvPicPr>
@@ -7287,7 +7846,7 @@
       </p:pic>
       <p:sp>
         <p:nvSpPr>
-          <p:cNvPr id="6" name="texto-62"/>
+          <p:cNvPr id="6" name="texto-63"/>
           <p:cNvSpPr txBox="1"/>
           <p:nvPr/>
         </p:nvSpPr>
@@ -7323,7 +7882,7 @@
       </p:sp>
       <p:sp>
         <p:nvSpPr>
-          <p:cNvPr id="7" name="marco-63"/>
+          <p:cNvPr id="7" name="marco-64"/>
           <p:cNvSpPr/>
           <p:nvPr/>
         </p:nvSpPr>
@@ -7357,7 +7916,7 @@
       </p:sp>
       <p:pic>
         <p:nvPicPr>
-          <p:cNvPr id="8" name="pantalla-64" descr="reclamar.png">    </p:cNvPr>
+          <p:cNvPr id="8" name="pantalla-65" descr="reclamar.png">    </p:cNvPr>
           <p:cNvPicPr>
             <a:picLocks noChangeAspect="1"/>
           </p:cNvPicPr>
@@ -7381,7 +7940,7 @@
       </p:pic>
       <p:sp>
         <p:nvSpPr>
-          <p:cNvPr id="9" name="texto-65"/>
+          <p:cNvPr id="9" name="texto-66"/>
           <p:cNvSpPr txBox="1"/>
           <p:nvPr/>
         </p:nvSpPr>
@@ -7417,7 +7976,7 @@
       </p:sp>
       <p:sp>
         <p:nvSpPr>
-          <p:cNvPr id="10" name="marco-66"/>
+          <p:cNvPr id="10" name="marco-67"/>
           <p:cNvSpPr/>
           <p:nvPr/>
         </p:nvSpPr>
@@ -7451,7 +8010,7 @@
       </p:sp>
       <p:pic>
         <p:nvPicPr>
-          <p:cNvPr id="11" name="pantalla-67" descr="artista.png">    </p:cNvPr>
+          <p:cNvPr id="11" name="pantalla-68" descr="artista.png">    </p:cNvPr>
           <p:cNvPicPr>
             <a:picLocks noChangeAspect="1"/>
           </p:cNvPicPr>
@@ -7475,7 +8034,7 @@
       </p:pic>
       <p:sp>
         <p:nvSpPr>
-          <p:cNvPr id="12" name="texto-68"/>
+          <p:cNvPr id="12" name="texto-69"/>
           <p:cNvSpPr txBox="1"/>
           <p:nvPr/>
         </p:nvSpPr>
@@ -7511,7 +8070,7 @@
       </p:sp>
       <p:sp>
         <p:nvSpPr>
-          <p:cNvPr id="13" name="texto-69"/>
+          <p:cNvPr id="13" name="texto-70"/>
           <p:cNvSpPr txBox="1"/>
           <p:nvPr/>
         </p:nvSpPr>
@@ -7699,7 +8258,7 @@
       </p:sp>
       <p:sp>
         <p:nvSpPr>
-          <p:cNvPr id="4" name="marco-70"/>
+          <p:cNvPr id="4" name="marco-71"/>
           <p:cNvSpPr/>
           <p:nvPr/>
         </p:nvSpPr>
@@ -7733,7 +8292,7 @@
       </p:sp>
       <p:pic>
         <p:nvPicPr>
-          <p:cNvPr id="5" name="pantalla-71" descr="panel.png">    </p:cNvPr>
+          <p:cNvPr id="5" name="pantalla-72" descr="panel.png">    </p:cNvPr>
           <p:cNvPicPr>
             <a:picLocks noChangeAspect="1"/>
           </p:cNvPicPr>
@@ -7757,7 +8316,7 @@
       </p:pic>
       <p:pic>
         <p:nvPicPr>
-          <p:cNvPr id="6" name="imagen-72" descr="panel.png">    </p:cNvPr>
+          <p:cNvPr id="6" name="imagen-73" descr="panel.png">    </p:cNvPr>
           <p:cNvPicPr>
             <a:picLocks noChangeAspect="1"/>
           </p:cNvPicPr>
@@ -7781,7 +8340,7 @@
       </p:pic>
       <p:sp>
         <p:nvSpPr>
-          <p:cNvPr id="7" name="texto-73"/>
+          <p:cNvPr id="7" name="texto-74"/>
           <p:cNvSpPr txBox="1"/>
           <p:nvPr/>
         </p:nvSpPr>
@@ -7857,7 +8416,7 @@
       </p:sp>
       <p:sp>
         <p:nvSpPr>
-          <p:cNvPr id="8" name="texto-74"/>
+          <p:cNvPr id="8" name="texto-75"/>
           <p:cNvSpPr txBox="1"/>
           <p:nvPr/>
         </p:nvSpPr>
